--- a/Lectures/04-data.pptx
+++ b/Lectures/04-data.pptx
@@ -15379,7 +15379,7 @@
             </a:pPr>
             <a:r>
               <a:rPr lang="en-US" dirty="0"/>
-              <a:t>Monday: quick assignment to check database connection (should take 1 minute)</a:t>
+              <a:t>Tomorrow: quick assignment to check database connection (should take 1 minute)</a:t>
             </a:r>
           </a:p>
           <a:p>
@@ -17449,7 +17449,7 @@
             </a:pPr>
             <a:r>
               <a:rPr lang="en-US" dirty="0"/>
-              <a:t>Monday: quick assignment to check database connection</a:t>
+              <a:t>Tomorrow: quick assignment to check database connection</a:t>
             </a:r>
           </a:p>
           <a:p>
@@ -17475,16 +17475,12 @@
             </a:r>
           </a:p>
           <a:p>
-            <a:endParaRPr lang="en-US"/>
-          </a:p>
-          <a:p>
-            <a:r>
-              <a:rPr lang="en-US"/>
-              <a:t>Make </a:t>
-            </a:r>
+            <a:endParaRPr lang="en-US" dirty="0"/>
+          </a:p>
+          <a:p>
             <a:r>
               <a:rPr lang="en-US" dirty="0"/>
-              <a:t>sure to read </a:t>
+              <a:t>Make sure to read </a:t>
             </a:r>
             <a:r>
               <a:rPr lang="en-US" b="1" dirty="0">

--- a/Lectures/04-data.pptx
+++ b/Lectures/04-data.pptx
@@ -5,7 +5,7 @@
     <p:sldMasterId id="2147483648" r:id="rId1"/>
   </p:sldMasterIdLst>
   <p:notesMasterIdLst>
-    <p:notesMasterId r:id="rId33"/>
+    <p:notesMasterId r:id="rId21"/>
   </p:notesMasterIdLst>
   <p:sldIdLst>
     <p:sldId id="256" r:id="rId2"/>
@@ -25,20 +25,8 @@
     <p:sldId id="323" r:id="rId16"/>
     <p:sldId id="304" r:id="rId17"/>
     <p:sldId id="283" r:id="rId18"/>
-    <p:sldId id="260" r:id="rId19"/>
-    <p:sldId id="261" r:id="rId20"/>
-    <p:sldId id="288" r:id="rId21"/>
-    <p:sldId id="296" r:id="rId22"/>
-    <p:sldId id="302" r:id="rId23"/>
-    <p:sldId id="287" r:id="rId24"/>
-    <p:sldId id="262" r:id="rId25"/>
-    <p:sldId id="289" r:id="rId26"/>
-    <p:sldId id="290" r:id="rId27"/>
-    <p:sldId id="280" r:id="rId28"/>
-    <p:sldId id="291" r:id="rId29"/>
-    <p:sldId id="293" r:id="rId30"/>
-    <p:sldId id="324" r:id="rId31"/>
-    <p:sldId id="303" r:id="rId32"/>
+    <p:sldId id="324" r:id="rId19"/>
+    <p:sldId id="303" r:id="rId20"/>
   </p:sldIdLst>
   <p:sldSz cx="12192000" cy="6858000"/>
   <p:notesSz cx="6858000" cy="9144000"/>
@@ -276,14 +264,14 @@
       <p15:sldGuideLst xmlns:p15="http://schemas.microsoft.com/office/powerpoint/2012/main"/>
     </p:ext>
     <p:ext uri="http://customooxmlschemas.google.com/">
-      <go:slidesCustomData xmlns="" xmlns:mc="http://schemas.openxmlformats.org/markup-compatibility/2006" xmlns:mv="urn:schemas-microsoft-com:mac:vml" xmlns:c="http://schemas.openxmlformats.org/drawingml/2006/chart" xmlns:dgm="http://schemas.openxmlformats.org/drawingml/2006/diagram" xmlns:o="urn:schemas-microsoft-com:office:office" xmlns:v="urn:schemas-microsoft-com:vml" xmlns:pvml="urn:schemas-microsoft-com:office:powerpoint" xmlns:com="http://schemas.openxmlformats.org/drawingml/2006/compatibility" xmlns:p14="http://schemas.microsoft.com/office/powerpoint/2010/main" xmlns:p15="http://schemas.microsoft.com/office/powerpoint/2012/main" xmlns:go="http://customooxmlschemas.google.com/" r:id="rId34" roundtripDataSignature="AMtx7mjFyVUGRZWio+dc9dxzYsimUxNJbg=="/>
+      <go:slidesCustomData xmlns:go="http://customooxmlschemas.google.com/" xmlns:p15="http://schemas.microsoft.com/office/powerpoint/2012/main" xmlns:p14="http://schemas.microsoft.com/office/powerpoint/2010/main" xmlns:com="http://schemas.openxmlformats.org/drawingml/2006/compatibility" xmlns:pvml="urn:schemas-microsoft-com:office:powerpoint" xmlns:v="urn:schemas-microsoft-com:vml" xmlns:o="urn:schemas-microsoft-com:office:office" xmlns:dgm="http://schemas.openxmlformats.org/drawingml/2006/diagram" xmlns:c="http://schemas.openxmlformats.org/drawingml/2006/chart" xmlns:mv="urn:schemas-microsoft-com:mac:vml" xmlns:mc="http://schemas.openxmlformats.org/markup-compatibility/2006" xmlns="" r:id="rId34" roundtripDataSignature="AMtx7mjFyVUGRZWio+dc9dxzYsimUxNJbg=="/>
     </p:ext>
   </p:extLst>
 </p:presentation>
 </file>
 
 <file path=ppt/diagrams/colors1.xml><?xml version="1.0" encoding="utf-8"?>
-<dgm:colorsDef xmlns:dgm="http://schemas.openxmlformats.org/drawingml/2006/diagram" xmlns:a="http://schemas.openxmlformats.org/drawingml/2006/main" uniqueId="urn:microsoft.com/office/officeart/2005/8/colors/colorful1">
+<dgm:colorsDef xmlns:dgm="http://schemas.openxmlformats.org/drawingml/2006/diagram" xmlns:a="http://schemas.openxmlformats.org/drawingml/2006/main" uniqueId="urn:microsoft.com/office/officeart/2005/8/colors/colorful1#3">
   <dgm:title val=""/>
   <dgm:desc val=""/>
   <dgm:catLst>
@@ -1205,7 +1193,7 @@
 <dgm:dataModel xmlns:dgm="http://schemas.openxmlformats.org/drawingml/2006/diagram" xmlns:a="http://schemas.openxmlformats.org/drawingml/2006/main">
   <dgm:ptLst>
     <dgm:pt modelId="{E9FB0F4E-6967-3B44-A32F-E8B1C7AE98D5}" type="doc">
-      <dgm:prSet loTypeId="urn:microsoft.com/office/officeart/2005/8/layout/process5" loCatId="" qsTypeId="urn:microsoft.com/office/officeart/2005/8/quickstyle/simple1" qsCatId="simple" csTypeId="urn:microsoft.com/office/officeart/2005/8/colors/colorful1" csCatId="colorful" phldr="1"/>
+      <dgm:prSet loTypeId="urn:microsoft.com/office/officeart/2005/8/layout/process5" loCatId="" qsTypeId="urn:microsoft.com/office/officeart/2005/8/quickstyle/simple1#3" qsCatId="simple" csTypeId="urn:microsoft.com/office/officeart/2005/8/colors/colorful1#3" csCatId="colorful" phldr="1"/>
       <dgm:spPr/>
       <dgm:t>
         <a:bodyPr/>
@@ -4254,7 +4242,7 @@
 </file>
 
 <file path=ppt/diagrams/quickStyle1.xml><?xml version="1.0" encoding="utf-8"?>
-<dgm:styleDef xmlns:dgm="http://schemas.openxmlformats.org/drawingml/2006/diagram" xmlns:a="http://schemas.openxmlformats.org/drawingml/2006/main" uniqueId="urn:microsoft.com/office/officeart/2005/8/quickstyle/simple1">
+<dgm:styleDef xmlns:dgm="http://schemas.openxmlformats.org/drawingml/2006/diagram" xmlns:a="http://schemas.openxmlformats.org/drawingml/2006/main" uniqueId="urn:microsoft.com/office/officeart/2005/8/quickstyle/simple1#3">
   <dgm:title val=""/>
   <dgm:desc val=""/>
   <dgm:catLst>
@@ -13642,8 +13630,21 @@
                   <a:schemeClr val="dk1"/>
                 </a:solidFill>
               </a:rPr>
-              <a:t>Data Acquisition, Storage, and Linkage </a:t>
+              <a:t>Data Acquisition </a:t>
             </a:r>
+            <a:r>
+              <a:rPr lang="en-US" sz="4400">
+                <a:solidFill>
+                  <a:schemeClr val="dk1"/>
+                </a:solidFill>
+              </a:rPr>
+              <a:t>and Storage</a:t>
+            </a:r>
+            <a:endParaRPr lang="en-US" sz="4400" dirty="0">
+              <a:solidFill>
+                <a:schemeClr val="dk1"/>
+              </a:solidFill>
+            </a:endParaRPr>
           </a:p>
         </p:txBody>
       </p:sp>
@@ -15055,9 +15056,15 @@
       </p:grpSpPr>
       <p:sp>
         <p:nvSpPr>
-          <p:cNvPr id="7170" name="Rectangle 2"/>
+          <p:cNvPr id="2" name="Title 1">
+            <a:extLst>
+              <a:ext uri="{FF2B5EF4-FFF2-40B4-BE49-F238E27FC236}">
+                <a16:creationId xmlns:a16="http://schemas.microsoft.com/office/drawing/2014/main" id="{BEFC7EB6-E3A6-F21F-0D18-5853E434A32C}"/>
+              </a:ext>
+            </a:extLst>
+          </p:cNvPr>
           <p:cNvSpPr>
-            <a:spLocks noGrp="1" noChangeArrowheads="1"/>
+            <a:spLocks noGrp="1"/>
           </p:cNvSpPr>
           <p:nvPr>
             <p:ph type="title"/>
@@ -15069,17 +15076,23 @@
           <a:lstStyle/>
           <a:p>
             <a:r>
-              <a:rPr lang="en-US" altLang="en-US" dirty="0"/>
-              <a:t> Linkage: Goals</a:t>
+              <a:rPr lang="en-US" dirty="0"/>
+              <a:t>Implications for your project</a:t>
             </a:r>
           </a:p>
         </p:txBody>
       </p:sp>
       <p:sp>
         <p:nvSpPr>
-          <p:cNvPr id="7171" name="Rectangle 3"/>
+          <p:cNvPr id="3" name="Text Placeholder 2">
+            <a:extLst>
+              <a:ext uri="{FF2B5EF4-FFF2-40B4-BE49-F238E27FC236}">
+                <a16:creationId xmlns:a16="http://schemas.microsoft.com/office/drawing/2014/main" id="{F7A6A9A7-FDC5-5263-7786-D807574B598C}"/>
+              </a:ext>
+            </a:extLst>
+          </p:cNvPr>
           <p:cNvSpPr>
-            <a:spLocks noGrp="1" noChangeArrowheads="1"/>
+            <a:spLocks noGrp="1"/>
           </p:cNvSpPr>
           <p:nvPr>
             <p:ph type="body" idx="1"/>
@@ -15087,58 +15100,39 @@
         </p:nvSpPr>
         <p:spPr/>
         <p:txBody>
-          <a:bodyPr>
-            <a:normAutofit/>
-          </a:bodyPr>
+          <a:bodyPr/>
           <a:lstStyle/>
           <a:p>
             <a:r>
-              <a:rPr lang="en-US" altLang="en-US" sz="3200" dirty="0"/>
-              <a:t>Determine if pairs of </a:t>
+              <a:rPr lang="en-US" dirty="0"/>
+              <a:t>Do you have enough data?</a:t>
             </a:r>
+          </a:p>
+          <a:p>
+            <a:endParaRPr lang="en-US" dirty="0"/>
+          </a:p>
+          <a:p>
             <a:r>
-              <a:rPr lang="en-US" altLang="en-US" sz="3200" i="1" dirty="0"/>
-              <a:t>records </a:t>
+              <a:rPr lang="en-US" dirty="0"/>
+              <a:t>Do you need to get additional data?</a:t>
             </a:r>
+          </a:p>
+          <a:p>
+            <a:endParaRPr lang="en-US" dirty="0"/>
+          </a:p>
+          <a:p>
             <a:r>
-              <a:rPr lang="en-US" altLang="en-US" sz="3200" dirty="0"/>
-              <a:t>describe the same </a:t>
+              <a:rPr lang="en-US" dirty="0"/>
+              <a:t>Which parts of the data should you prioritize looking at and understanding?</a:t>
             </a:r>
+          </a:p>
+          <a:p>
+            <a:endParaRPr lang="en-US" dirty="0"/>
+          </a:p>
+          <a:p>
             <a:r>
-              <a:rPr lang="en-US" altLang="en-US" sz="3200"/>
-              <a:t>entity </a:t>
-            </a:r>
-            <a:endParaRPr lang="en-US" altLang="en-US" sz="3200" dirty="0"/>
-          </a:p>
-          <a:p>
-            <a:endParaRPr lang="en-US" altLang="en-US" sz="3200" dirty="0"/>
-          </a:p>
-          <a:p>
-            <a:r>
-              <a:rPr lang="en-US" altLang="en-US" sz="3200" dirty="0"/>
-              <a:t>Main applications: </a:t>
-            </a:r>
-          </a:p>
-          <a:p>
-            <a:pPr lvl="1"/>
-            <a:r>
-              <a:rPr lang="en-US" altLang="en-US" sz="2800" i="1" dirty="0"/>
-              <a:t>Joining</a:t>
-            </a:r>
-            <a:r>
-              <a:rPr lang="en-US" altLang="en-US" sz="2800" dirty="0"/>
-              <a:t> two different data sources</a:t>
-            </a:r>
-          </a:p>
-          <a:p>
-            <a:pPr lvl="1"/>
-            <a:r>
-              <a:rPr lang="en-US" altLang="en-US" sz="2800" i="1" dirty="0"/>
-              <a:t>Removing duplicates</a:t>
-            </a:r>
-            <a:r>
-              <a:rPr lang="en-US" altLang="en-US" sz="2800" dirty="0"/>
-              <a:t> from a single data source</a:t>
+              <a:rPr lang="en-US" dirty="0"/>
+              <a:t>What do you need to do now that will be harder to do later?</a:t>
             </a:r>
           </a:p>
         </p:txBody>
@@ -15146,7 +15140,7 @@
     </p:spTree>
     <p:extLst>
       <p:ext uri="{BB962C8B-B14F-4D97-AF65-F5344CB8AC3E}">
-        <p14:creationId xmlns:p14="http://schemas.microsoft.com/office/powerpoint/2010/main" val="3416135692"/>
+        <p14:creationId xmlns:p14="http://schemas.microsoft.com/office/powerpoint/2010/main" val="1857705847"/>
       </p:ext>
     </p:extLst>
   </p:cSld>
@@ -15175,9 +15169,15 @@
       </p:grpSpPr>
       <p:sp>
         <p:nvSpPr>
-          <p:cNvPr id="8194" name="Rectangle 2"/>
+          <p:cNvPr id="3" name="Title 2">
+            <a:extLst>
+              <a:ext uri="{FF2B5EF4-FFF2-40B4-BE49-F238E27FC236}">
+                <a16:creationId xmlns:a16="http://schemas.microsoft.com/office/drawing/2014/main" id="{9323871C-7CA8-1448-8FFC-1AE6E1838941}"/>
+              </a:ext>
+            </a:extLst>
+          </p:cNvPr>
           <p:cNvSpPr>
-            <a:spLocks noGrp="1" noChangeArrowheads="1"/>
+            <a:spLocks noGrp="1"/>
           </p:cNvSpPr>
           <p:nvPr>
             <p:ph type="title"/>
@@ -15189,17 +15189,23 @@
           <a:lstStyle/>
           <a:p>
             <a:r>
-              <a:rPr lang="en-US" altLang="en-US" dirty="0"/>
-              <a:t> Record Linkage: Synonyms</a:t>
+              <a:rPr lang="en-US" dirty="0"/>
+              <a:t>Things to remember</a:t>
             </a:r>
           </a:p>
         </p:txBody>
       </p:sp>
       <p:sp>
         <p:nvSpPr>
-          <p:cNvPr id="8195" name="Rectangle 3"/>
+          <p:cNvPr id="4" name="Text Placeholder 3">
+            <a:extLst>
+              <a:ext uri="{FF2B5EF4-FFF2-40B4-BE49-F238E27FC236}">
+                <a16:creationId xmlns:a16="http://schemas.microsoft.com/office/drawing/2014/main" id="{5E600BA7-FA45-884F-9820-9E5F2CB7AA48}"/>
+              </a:ext>
+            </a:extLst>
+          </p:cNvPr>
           <p:cNvSpPr>
-            <a:spLocks noGrp="1" noChangeArrowheads="1"/>
+            <a:spLocks noGrp="1"/>
           </p:cNvSpPr>
           <p:nvPr>
             <p:ph type="body" idx="1"/>
@@ -15210,69 +15216,73 @@
           <a:bodyPr/>
           <a:lstStyle/>
           <a:p>
-            <a:pPr>
-              <a:lnSpc>
-                <a:spcPct val="150000"/>
-              </a:lnSpc>
+            <a:r>
+              <a:rPr lang="en-US" b="1" dirty="0"/>
+              <a:t>Make sure and check that you can access your project data today</a:t>
+            </a:r>
+            <a:br>
+              <a:rPr lang="en-US" b="1" dirty="0"/>
+            </a:br>
+            <a:endParaRPr lang="en-US" b="1" dirty="0"/>
+          </a:p>
+          <a:p>
+            <a:r>
+              <a:rPr lang="en-US" dirty="0"/>
+              <a:t>What’s coming next week:</a:t>
+            </a:r>
+          </a:p>
+          <a:p>
+            <a:pPr lvl="1">
+              <a:spcBef>
+                <a:spcPts val="1000"/>
+              </a:spcBef>
             </a:pPr>
             <a:r>
-              <a:rPr lang="en-US" altLang="en-US" dirty="0"/>
-              <a:t>(data) matching</a:t>
+              <a:rPr lang="en-US" dirty="0"/>
+              <a:t>Tomorrow: quick assignment to check database connection</a:t>
             </a:r>
           </a:p>
           <a:p>
-            <a:pPr>
-              <a:lnSpc>
-                <a:spcPct val="150000"/>
-              </a:lnSpc>
+            <a:pPr lvl="1">
+              <a:spcBef>
+                <a:spcPts val="1000"/>
+              </a:spcBef>
             </a:pPr>
             <a:r>
-              <a:rPr lang="en-US" altLang="en-US" dirty="0"/>
-              <a:t>merge/purge</a:t>
+              <a:rPr lang="en-US" dirty="0"/>
+              <a:t>Tuesday: weekly feedback form</a:t>
             </a:r>
           </a:p>
           <a:p>
-            <a:pPr>
-              <a:lnSpc>
-                <a:spcPct val="150000"/>
-              </a:lnSpc>
+            <a:pPr lvl="1">
+              <a:spcBef>
+                <a:spcPts val="1000"/>
+              </a:spcBef>
             </a:pPr>
             <a:r>
-              <a:rPr lang="en-US" altLang="en-US" dirty="0"/>
-              <a:t>duplicate detection</a:t>
+              <a:rPr lang="en-US" dirty="0"/>
+              <a:t>Tuesday: Data Exploration + Teamwork</a:t>
             </a:r>
           </a:p>
           <a:p>
-            <a:pPr>
-              <a:lnSpc>
-                <a:spcPct val="150000"/>
-              </a:lnSpc>
-            </a:pPr>
+            <a:endParaRPr lang="en-US" dirty="0"/>
+          </a:p>
+          <a:p>
             <a:r>
-              <a:rPr lang="en-US" altLang="en-US" dirty="0"/>
-              <a:t>de-duping</a:t>
+              <a:rPr lang="en-US" dirty="0"/>
+              <a:t>Make sure to read </a:t>
             </a:r>
-          </a:p>
-          <a:p>
-            <a:pPr>
-              <a:lnSpc>
-                <a:spcPct val="150000"/>
-              </a:lnSpc>
-            </a:pPr>
             <a:r>
-              <a:rPr lang="en-US" altLang="en-US" dirty="0"/>
-              <a:t>reference matching</a:t>
+              <a:rPr lang="en-US" b="1" dirty="0">
+                <a:solidFill>
+                  <a:srgbClr val="C00000"/>
+                </a:solidFill>
+              </a:rPr>
+              <a:t>project proposal </a:t>
             </a:r>
-          </a:p>
-          <a:p>
-            <a:pPr>
-              <a:lnSpc>
-                <a:spcPct val="150000"/>
-              </a:lnSpc>
-            </a:pPr>
             <a:r>
-              <a:rPr lang="en-US" altLang="en-US" dirty="0"/>
-              <a:t>co-reference/anaphora resolution</a:t>
+              <a:rPr lang="en-US" dirty="0"/>
+              <a:t>preparation guidelines</a:t>
             </a:r>
           </a:p>
         </p:txBody>
@@ -15280,7 +15290,7 @@
     </p:spTree>
     <p:extLst>
       <p:ext uri="{BB962C8B-B14F-4D97-AF65-F5344CB8AC3E}">
-        <p14:creationId xmlns:p14="http://schemas.microsoft.com/office/powerpoint/2010/main" val="2446059493"/>
+        <p14:creationId xmlns:p14="http://schemas.microsoft.com/office/powerpoint/2010/main" val="2953224412"/>
       </p:ext>
     </p:extLst>
   </p:cSld>
@@ -15431,1678 +15441,6 @@
     <p:extLst>
       <p:ext uri="{BB962C8B-B14F-4D97-AF65-F5344CB8AC3E}">
         <p14:creationId xmlns:p14="http://schemas.microsoft.com/office/powerpoint/2010/main" val="1285932549"/>
-      </p:ext>
-    </p:extLst>
-  </p:cSld>
-  <p:clrMapOvr>
-    <a:masterClrMapping/>
-  </p:clrMapOvr>
-</p:sld>
-</file>
-
-<file path=ppt/slides/slide20.xml><?xml version="1.0" encoding="utf-8"?>
-<p:sld xmlns:a="http://schemas.openxmlformats.org/drawingml/2006/main" xmlns:r="http://schemas.openxmlformats.org/officeDocument/2006/relationships" xmlns:p="http://schemas.openxmlformats.org/presentationml/2006/main">
-  <p:cSld>
-    <p:spTree>
-      <p:nvGrpSpPr>
-        <p:cNvPr id="1" name=""/>
-        <p:cNvGrpSpPr/>
-        <p:nvPr/>
-      </p:nvGrpSpPr>
-      <p:grpSpPr>
-        <a:xfrm>
-          <a:off x="0" y="0"/>
-          <a:ext cx="0" cy="0"/>
-          <a:chOff x="0" y="0"/>
-          <a:chExt cx="0" cy="0"/>
-        </a:xfrm>
-      </p:grpSpPr>
-      <p:sp>
-        <p:nvSpPr>
-          <p:cNvPr id="2" name="Title 1"/>
-          <p:cNvSpPr>
-            <a:spLocks noGrp="1"/>
-          </p:cNvSpPr>
-          <p:nvPr>
-            <p:ph type="title"/>
-          </p:nvPr>
-        </p:nvSpPr>
-        <p:spPr/>
-        <p:txBody>
-          <a:bodyPr/>
-          <a:lstStyle/>
-          <a:p>
-            <a:r>
-              <a:rPr lang="en-US" dirty="0"/>
-              <a:t>Common reasons for mismatches</a:t>
-            </a:r>
-          </a:p>
-        </p:txBody>
-      </p:sp>
-      <p:sp>
-        <p:nvSpPr>
-          <p:cNvPr id="3" name="Content Placeholder 2"/>
-          <p:cNvSpPr>
-            <a:spLocks noGrp="1"/>
-          </p:cNvSpPr>
-          <p:nvPr>
-            <p:ph type="body" idx="1"/>
-          </p:nvPr>
-        </p:nvSpPr>
-        <p:spPr/>
-        <p:txBody>
-          <a:bodyPr>
-            <a:normAutofit/>
-          </a:bodyPr>
-          <a:lstStyle/>
-          <a:p>
-            <a:r>
-              <a:rPr lang="en-US" dirty="0"/>
-              <a:t>Case (capital, lower case, etc.)</a:t>
-            </a:r>
-          </a:p>
-          <a:p>
-            <a:r>
-              <a:rPr lang="en-US" dirty="0"/>
-              <a:t>Nicknames</a:t>
-            </a:r>
-          </a:p>
-          <a:p>
-            <a:r>
-              <a:rPr lang="en-US" dirty="0"/>
-              <a:t>Prefixes</a:t>
-            </a:r>
-          </a:p>
-          <a:p>
-            <a:r>
-              <a:rPr lang="en-US" dirty="0"/>
-              <a:t>Suffixes</a:t>
-            </a:r>
-          </a:p>
-          <a:p>
-            <a:r>
-              <a:rPr lang="en-US" dirty="0"/>
-              <a:t>Initials</a:t>
-            </a:r>
-          </a:p>
-          <a:p>
-            <a:r>
-              <a:rPr lang="en-US" dirty="0"/>
-              <a:t>Punctuation</a:t>
-            </a:r>
-          </a:p>
-          <a:p>
-            <a:r>
-              <a:rPr lang="en-US" dirty="0"/>
-              <a:t>Spaces</a:t>
-            </a:r>
-          </a:p>
-          <a:p>
-            <a:r>
-              <a:rPr lang="en-US" dirty="0"/>
-              <a:t>Digits </a:t>
-            </a:r>
-          </a:p>
-          <a:p>
-            <a:r>
-              <a:rPr lang="en-US" dirty="0"/>
-              <a:t>Transpositions</a:t>
-            </a:r>
-          </a:p>
-          <a:p>
-            <a:r>
-              <a:rPr lang="en-US" dirty="0"/>
-              <a:t>Abbreviations</a:t>
-            </a:r>
-          </a:p>
-          <a:p>
-            <a:endParaRPr lang="en-US" dirty="0"/>
-          </a:p>
-          <a:p>
-            <a:endParaRPr lang="en-US" dirty="0"/>
-          </a:p>
-        </p:txBody>
-      </p:sp>
-    </p:spTree>
-    <p:extLst>
-      <p:ext uri="{BB962C8B-B14F-4D97-AF65-F5344CB8AC3E}">
-        <p14:creationId xmlns:p14="http://schemas.microsoft.com/office/powerpoint/2010/main" val="2535006963"/>
-      </p:ext>
-    </p:extLst>
-  </p:cSld>
-  <p:clrMapOvr>
-    <a:masterClrMapping/>
-  </p:clrMapOvr>
-  <p:timing>
-    <p:tnLst>
-      <p:par>
-        <p:cTn id="1" dur="indefinite" restart="never" nodeType="tmRoot">
-          <p:childTnLst>
-            <p:seq concurrent="1" nextAc="seek">
-              <p:cTn id="2" dur="indefinite" nodeType="mainSeq">
-                <p:childTnLst>
-                  <p:par>
-                    <p:cTn id="3" fill="hold">
-                      <p:stCondLst>
-                        <p:cond delay="indefinite"/>
-                      </p:stCondLst>
-                      <p:childTnLst>
-                        <p:par>
-                          <p:cTn id="4" fill="hold">
-                            <p:stCondLst>
-                              <p:cond delay="0"/>
-                            </p:stCondLst>
-                            <p:childTnLst>
-                              <p:par>
-                                <p:cTn id="5" presetID="1" presetClass="entr" presetSubtype="0" fill="hold" grpId="0" nodeType="clickEffect">
-                                  <p:stCondLst>
-                                    <p:cond delay="0"/>
-                                  </p:stCondLst>
-                                  <p:childTnLst>
-                                    <p:set>
-                                      <p:cBhvr>
-                                        <p:cTn id="6" dur="1" fill="hold">
-                                          <p:stCondLst>
-                                            <p:cond delay="0"/>
-                                          </p:stCondLst>
-                                        </p:cTn>
-                                        <p:tgtEl>
-                                          <p:spTgt spid="3">
-                                            <p:txEl>
-                                              <p:pRg st="0" end="0"/>
-                                            </p:txEl>
-                                          </p:spTgt>
-                                        </p:tgtEl>
-                                        <p:attrNameLst>
-                                          <p:attrName>style.visibility</p:attrName>
-                                        </p:attrNameLst>
-                                      </p:cBhvr>
-                                      <p:to>
-                                        <p:strVal val="visible"/>
-                                      </p:to>
-                                    </p:set>
-                                  </p:childTnLst>
-                                </p:cTn>
-                              </p:par>
-                            </p:childTnLst>
-                          </p:cTn>
-                        </p:par>
-                      </p:childTnLst>
-                    </p:cTn>
-                  </p:par>
-                  <p:par>
-                    <p:cTn id="7" fill="hold">
-                      <p:stCondLst>
-                        <p:cond delay="indefinite"/>
-                      </p:stCondLst>
-                      <p:childTnLst>
-                        <p:par>
-                          <p:cTn id="8" fill="hold">
-                            <p:stCondLst>
-                              <p:cond delay="0"/>
-                            </p:stCondLst>
-                            <p:childTnLst>
-                              <p:par>
-                                <p:cTn id="9" presetID="1" presetClass="entr" presetSubtype="0" fill="hold" grpId="0" nodeType="clickEffect">
-                                  <p:stCondLst>
-                                    <p:cond delay="0"/>
-                                  </p:stCondLst>
-                                  <p:childTnLst>
-                                    <p:set>
-                                      <p:cBhvr>
-                                        <p:cTn id="10" dur="1" fill="hold">
-                                          <p:stCondLst>
-                                            <p:cond delay="0"/>
-                                          </p:stCondLst>
-                                        </p:cTn>
-                                        <p:tgtEl>
-                                          <p:spTgt spid="3">
-                                            <p:txEl>
-                                              <p:pRg st="1" end="1"/>
-                                            </p:txEl>
-                                          </p:spTgt>
-                                        </p:tgtEl>
-                                        <p:attrNameLst>
-                                          <p:attrName>style.visibility</p:attrName>
-                                        </p:attrNameLst>
-                                      </p:cBhvr>
-                                      <p:to>
-                                        <p:strVal val="visible"/>
-                                      </p:to>
-                                    </p:set>
-                                  </p:childTnLst>
-                                </p:cTn>
-                              </p:par>
-                            </p:childTnLst>
-                          </p:cTn>
-                        </p:par>
-                      </p:childTnLst>
-                    </p:cTn>
-                  </p:par>
-                  <p:par>
-                    <p:cTn id="11" fill="hold">
-                      <p:stCondLst>
-                        <p:cond delay="indefinite"/>
-                      </p:stCondLst>
-                      <p:childTnLst>
-                        <p:par>
-                          <p:cTn id="12" fill="hold">
-                            <p:stCondLst>
-                              <p:cond delay="0"/>
-                            </p:stCondLst>
-                            <p:childTnLst>
-                              <p:par>
-                                <p:cTn id="13" presetID="1" presetClass="entr" presetSubtype="0" fill="hold" grpId="0" nodeType="clickEffect">
-                                  <p:stCondLst>
-                                    <p:cond delay="0"/>
-                                  </p:stCondLst>
-                                  <p:childTnLst>
-                                    <p:set>
-                                      <p:cBhvr>
-                                        <p:cTn id="14" dur="1" fill="hold">
-                                          <p:stCondLst>
-                                            <p:cond delay="0"/>
-                                          </p:stCondLst>
-                                        </p:cTn>
-                                        <p:tgtEl>
-                                          <p:spTgt spid="3">
-                                            <p:txEl>
-                                              <p:pRg st="2" end="2"/>
-                                            </p:txEl>
-                                          </p:spTgt>
-                                        </p:tgtEl>
-                                        <p:attrNameLst>
-                                          <p:attrName>style.visibility</p:attrName>
-                                        </p:attrNameLst>
-                                      </p:cBhvr>
-                                      <p:to>
-                                        <p:strVal val="visible"/>
-                                      </p:to>
-                                    </p:set>
-                                  </p:childTnLst>
-                                </p:cTn>
-                              </p:par>
-                            </p:childTnLst>
-                          </p:cTn>
-                        </p:par>
-                      </p:childTnLst>
-                    </p:cTn>
-                  </p:par>
-                  <p:par>
-                    <p:cTn id="15" fill="hold">
-                      <p:stCondLst>
-                        <p:cond delay="indefinite"/>
-                      </p:stCondLst>
-                      <p:childTnLst>
-                        <p:par>
-                          <p:cTn id="16" fill="hold">
-                            <p:stCondLst>
-                              <p:cond delay="0"/>
-                            </p:stCondLst>
-                            <p:childTnLst>
-                              <p:par>
-                                <p:cTn id="17" presetID="1" presetClass="entr" presetSubtype="0" fill="hold" grpId="0" nodeType="clickEffect">
-                                  <p:stCondLst>
-                                    <p:cond delay="0"/>
-                                  </p:stCondLst>
-                                  <p:childTnLst>
-                                    <p:set>
-                                      <p:cBhvr>
-                                        <p:cTn id="18" dur="1" fill="hold">
-                                          <p:stCondLst>
-                                            <p:cond delay="0"/>
-                                          </p:stCondLst>
-                                        </p:cTn>
-                                        <p:tgtEl>
-                                          <p:spTgt spid="3">
-                                            <p:txEl>
-                                              <p:pRg st="3" end="3"/>
-                                            </p:txEl>
-                                          </p:spTgt>
-                                        </p:tgtEl>
-                                        <p:attrNameLst>
-                                          <p:attrName>style.visibility</p:attrName>
-                                        </p:attrNameLst>
-                                      </p:cBhvr>
-                                      <p:to>
-                                        <p:strVal val="visible"/>
-                                      </p:to>
-                                    </p:set>
-                                  </p:childTnLst>
-                                </p:cTn>
-                              </p:par>
-                            </p:childTnLst>
-                          </p:cTn>
-                        </p:par>
-                      </p:childTnLst>
-                    </p:cTn>
-                  </p:par>
-                  <p:par>
-                    <p:cTn id="19" fill="hold">
-                      <p:stCondLst>
-                        <p:cond delay="indefinite"/>
-                      </p:stCondLst>
-                      <p:childTnLst>
-                        <p:par>
-                          <p:cTn id="20" fill="hold">
-                            <p:stCondLst>
-                              <p:cond delay="0"/>
-                            </p:stCondLst>
-                            <p:childTnLst>
-                              <p:par>
-                                <p:cTn id="21" presetID="1" presetClass="entr" presetSubtype="0" fill="hold" grpId="0" nodeType="clickEffect">
-                                  <p:stCondLst>
-                                    <p:cond delay="0"/>
-                                  </p:stCondLst>
-                                  <p:childTnLst>
-                                    <p:set>
-                                      <p:cBhvr>
-                                        <p:cTn id="22" dur="1" fill="hold">
-                                          <p:stCondLst>
-                                            <p:cond delay="0"/>
-                                          </p:stCondLst>
-                                        </p:cTn>
-                                        <p:tgtEl>
-                                          <p:spTgt spid="3">
-                                            <p:txEl>
-                                              <p:pRg st="4" end="4"/>
-                                            </p:txEl>
-                                          </p:spTgt>
-                                        </p:tgtEl>
-                                        <p:attrNameLst>
-                                          <p:attrName>style.visibility</p:attrName>
-                                        </p:attrNameLst>
-                                      </p:cBhvr>
-                                      <p:to>
-                                        <p:strVal val="visible"/>
-                                      </p:to>
-                                    </p:set>
-                                  </p:childTnLst>
-                                </p:cTn>
-                              </p:par>
-                            </p:childTnLst>
-                          </p:cTn>
-                        </p:par>
-                      </p:childTnLst>
-                    </p:cTn>
-                  </p:par>
-                  <p:par>
-                    <p:cTn id="23" fill="hold">
-                      <p:stCondLst>
-                        <p:cond delay="indefinite"/>
-                      </p:stCondLst>
-                      <p:childTnLst>
-                        <p:par>
-                          <p:cTn id="24" fill="hold">
-                            <p:stCondLst>
-                              <p:cond delay="0"/>
-                            </p:stCondLst>
-                            <p:childTnLst>
-                              <p:par>
-                                <p:cTn id="25" presetID="1" presetClass="entr" presetSubtype="0" fill="hold" grpId="0" nodeType="clickEffect">
-                                  <p:stCondLst>
-                                    <p:cond delay="0"/>
-                                  </p:stCondLst>
-                                  <p:childTnLst>
-                                    <p:set>
-                                      <p:cBhvr>
-                                        <p:cTn id="26" dur="1" fill="hold">
-                                          <p:stCondLst>
-                                            <p:cond delay="0"/>
-                                          </p:stCondLst>
-                                        </p:cTn>
-                                        <p:tgtEl>
-                                          <p:spTgt spid="3">
-                                            <p:txEl>
-                                              <p:pRg st="5" end="5"/>
-                                            </p:txEl>
-                                          </p:spTgt>
-                                        </p:tgtEl>
-                                        <p:attrNameLst>
-                                          <p:attrName>style.visibility</p:attrName>
-                                        </p:attrNameLst>
-                                      </p:cBhvr>
-                                      <p:to>
-                                        <p:strVal val="visible"/>
-                                      </p:to>
-                                    </p:set>
-                                  </p:childTnLst>
-                                </p:cTn>
-                              </p:par>
-                            </p:childTnLst>
-                          </p:cTn>
-                        </p:par>
-                      </p:childTnLst>
-                    </p:cTn>
-                  </p:par>
-                  <p:par>
-                    <p:cTn id="27" fill="hold">
-                      <p:stCondLst>
-                        <p:cond delay="indefinite"/>
-                      </p:stCondLst>
-                      <p:childTnLst>
-                        <p:par>
-                          <p:cTn id="28" fill="hold">
-                            <p:stCondLst>
-                              <p:cond delay="0"/>
-                            </p:stCondLst>
-                            <p:childTnLst>
-                              <p:par>
-                                <p:cTn id="29" presetID="1" presetClass="entr" presetSubtype="0" fill="hold" grpId="0" nodeType="clickEffect">
-                                  <p:stCondLst>
-                                    <p:cond delay="0"/>
-                                  </p:stCondLst>
-                                  <p:childTnLst>
-                                    <p:set>
-                                      <p:cBhvr>
-                                        <p:cTn id="30" dur="1" fill="hold">
-                                          <p:stCondLst>
-                                            <p:cond delay="0"/>
-                                          </p:stCondLst>
-                                        </p:cTn>
-                                        <p:tgtEl>
-                                          <p:spTgt spid="3">
-                                            <p:txEl>
-                                              <p:pRg st="6" end="6"/>
-                                            </p:txEl>
-                                          </p:spTgt>
-                                        </p:tgtEl>
-                                        <p:attrNameLst>
-                                          <p:attrName>style.visibility</p:attrName>
-                                        </p:attrNameLst>
-                                      </p:cBhvr>
-                                      <p:to>
-                                        <p:strVal val="visible"/>
-                                      </p:to>
-                                    </p:set>
-                                  </p:childTnLst>
-                                </p:cTn>
-                              </p:par>
-                            </p:childTnLst>
-                          </p:cTn>
-                        </p:par>
-                      </p:childTnLst>
-                    </p:cTn>
-                  </p:par>
-                  <p:par>
-                    <p:cTn id="31" fill="hold">
-                      <p:stCondLst>
-                        <p:cond delay="indefinite"/>
-                      </p:stCondLst>
-                      <p:childTnLst>
-                        <p:par>
-                          <p:cTn id="32" fill="hold">
-                            <p:stCondLst>
-                              <p:cond delay="0"/>
-                            </p:stCondLst>
-                            <p:childTnLst>
-                              <p:par>
-                                <p:cTn id="33" presetID="1" presetClass="entr" presetSubtype="0" fill="hold" grpId="0" nodeType="clickEffect">
-                                  <p:stCondLst>
-                                    <p:cond delay="0"/>
-                                  </p:stCondLst>
-                                  <p:childTnLst>
-                                    <p:set>
-                                      <p:cBhvr>
-                                        <p:cTn id="34" dur="1" fill="hold">
-                                          <p:stCondLst>
-                                            <p:cond delay="0"/>
-                                          </p:stCondLst>
-                                        </p:cTn>
-                                        <p:tgtEl>
-                                          <p:spTgt spid="3">
-                                            <p:txEl>
-                                              <p:pRg st="7" end="7"/>
-                                            </p:txEl>
-                                          </p:spTgt>
-                                        </p:tgtEl>
-                                        <p:attrNameLst>
-                                          <p:attrName>style.visibility</p:attrName>
-                                        </p:attrNameLst>
-                                      </p:cBhvr>
-                                      <p:to>
-                                        <p:strVal val="visible"/>
-                                      </p:to>
-                                    </p:set>
-                                  </p:childTnLst>
-                                </p:cTn>
-                              </p:par>
-                            </p:childTnLst>
-                          </p:cTn>
-                        </p:par>
-                      </p:childTnLst>
-                    </p:cTn>
-                  </p:par>
-                  <p:par>
-                    <p:cTn id="35" fill="hold">
-                      <p:stCondLst>
-                        <p:cond delay="indefinite"/>
-                      </p:stCondLst>
-                      <p:childTnLst>
-                        <p:par>
-                          <p:cTn id="36" fill="hold">
-                            <p:stCondLst>
-                              <p:cond delay="0"/>
-                            </p:stCondLst>
-                            <p:childTnLst>
-                              <p:par>
-                                <p:cTn id="37" presetID="1" presetClass="entr" presetSubtype="0" fill="hold" grpId="0" nodeType="clickEffect">
-                                  <p:stCondLst>
-                                    <p:cond delay="0"/>
-                                  </p:stCondLst>
-                                  <p:childTnLst>
-                                    <p:set>
-                                      <p:cBhvr>
-                                        <p:cTn id="38" dur="1" fill="hold">
-                                          <p:stCondLst>
-                                            <p:cond delay="0"/>
-                                          </p:stCondLst>
-                                        </p:cTn>
-                                        <p:tgtEl>
-                                          <p:spTgt spid="3">
-                                            <p:txEl>
-                                              <p:pRg st="8" end="8"/>
-                                            </p:txEl>
-                                          </p:spTgt>
-                                        </p:tgtEl>
-                                        <p:attrNameLst>
-                                          <p:attrName>style.visibility</p:attrName>
-                                        </p:attrNameLst>
-                                      </p:cBhvr>
-                                      <p:to>
-                                        <p:strVal val="visible"/>
-                                      </p:to>
-                                    </p:set>
-                                  </p:childTnLst>
-                                </p:cTn>
-                              </p:par>
-                            </p:childTnLst>
-                          </p:cTn>
-                        </p:par>
-                      </p:childTnLst>
-                    </p:cTn>
-                  </p:par>
-                  <p:par>
-                    <p:cTn id="39" fill="hold">
-                      <p:stCondLst>
-                        <p:cond delay="indefinite"/>
-                      </p:stCondLst>
-                      <p:childTnLst>
-                        <p:par>
-                          <p:cTn id="40" fill="hold">
-                            <p:stCondLst>
-                              <p:cond delay="0"/>
-                            </p:stCondLst>
-                            <p:childTnLst>
-                              <p:par>
-                                <p:cTn id="41" presetID="1" presetClass="entr" presetSubtype="0" fill="hold" grpId="0" nodeType="clickEffect">
-                                  <p:stCondLst>
-                                    <p:cond delay="0"/>
-                                  </p:stCondLst>
-                                  <p:childTnLst>
-                                    <p:set>
-                                      <p:cBhvr>
-                                        <p:cTn id="42" dur="1" fill="hold">
-                                          <p:stCondLst>
-                                            <p:cond delay="0"/>
-                                          </p:stCondLst>
-                                        </p:cTn>
-                                        <p:tgtEl>
-                                          <p:spTgt spid="3">
-                                            <p:txEl>
-                                              <p:pRg st="9" end="9"/>
-                                            </p:txEl>
-                                          </p:spTgt>
-                                        </p:tgtEl>
-                                        <p:attrNameLst>
-                                          <p:attrName>style.visibility</p:attrName>
-                                        </p:attrNameLst>
-                                      </p:cBhvr>
-                                      <p:to>
-                                        <p:strVal val="visible"/>
-                                      </p:to>
-                                    </p:set>
-                                  </p:childTnLst>
-                                </p:cTn>
-                              </p:par>
-                            </p:childTnLst>
-                          </p:cTn>
-                        </p:par>
-                      </p:childTnLst>
-                    </p:cTn>
-                  </p:par>
-                </p:childTnLst>
-              </p:cTn>
-              <p:prevCondLst>
-                <p:cond evt="onPrev" delay="0">
-                  <p:tgtEl>
-                    <p:sldTgt/>
-                  </p:tgtEl>
-                </p:cond>
-              </p:prevCondLst>
-              <p:nextCondLst>
-                <p:cond evt="onNext" delay="0">
-                  <p:tgtEl>
-                    <p:sldTgt/>
-                  </p:tgtEl>
-                </p:cond>
-              </p:nextCondLst>
-            </p:seq>
-          </p:childTnLst>
-        </p:cTn>
-      </p:par>
-    </p:tnLst>
-    <p:bldLst>
-      <p:bldP spid="3" grpId="0" build="p"/>
-    </p:bldLst>
-  </p:timing>
-</p:sld>
-</file>
-
-<file path=ppt/slides/slide21.xml><?xml version="1.0" encoding="utf-8"?>
-<p:sld xmlns:a="http://schemas.openxmlformats.org/drawingml/2006/main" xmlns:r="http://schemas.openxmlformats.org/officeDocument/2006/relationships" xmlns:p="http://schemas.openxmlformats.org/presentationml/2006/main">
-  <p:cSld>
-    <p:spTree>
-      <p:nvGrpSpPr>
-        <p:cNvPr id="1" name=""/>
-        <p:cNvGrpSpPr/>
-        <p:nvPr/>
-      </p:nvGrpSpPr>
-      <p:grpSpPr>
-        <a:xfrm>
-          <a:off x="0" y="0"/>
-          <a:ext cx="0" cy="0"/>
-          <a:chOff x="0" y="0"/>
-          <a:chExt cx="0" cy="0"/>
-        </a:xfrm>
-      </p:grpSpPr>
-      <p:sp>
-        <p:nvSpPr>
-          <p:cNvPr id="2" name="Title 1">
-            <a:extLst>
-              <a:ext uri="{FF2B5EF4-FFF2-40B4-BE49-F238E27FC236}">
-                <a16:creationId xmlns:a16="http://schemas.microsoft.com/office/drawing/2014/main" id="{52E04EB1-290D-E647-B684-F8A3D3B280EE}"/>
-              </a:ext>
-            </a:extLst>
-          </p:cNvPr>
-          <p:cNvSpPr>
-            <a:spLocks noGrp="1"/>
-          </p:cNvSpPr>
-          <p:nvPr>
-            <p:ph type="title"/>
-          </p:nvPr>
-        </p:nvSpPr>
-        <p:spPr/>
-        <p:txBody>
-          <a:bodyPr/>
-          <a:lstStyle/>
-          <a:p>
-            <a:r>
-              <a:rPr lang="en-US" dirty="0"/>
-              <a:t>Discussion Topic</a:t>
-            </a:r>
-          </a:p>
-        </p:txBody>
-      </p:sp>
-      <p:sp>
-        <p:nvSpPr>
-          <p:cNvPr id="3" name="Text Placeholder 2">
-            <a:extLst>
-              <a:ext uri="{FF2B5EF4-FFF2-40B4-BE49-F238E27FC236}">
-                <a16:creationId xmlns:a16="http://schemas.microsoft.com/office/drawing/2014/main" id="{73DF5889-4B8C-7449-87CD-1929C07EE849}"/>
-              </a:ext>
-            </a:extLst>
-          </p:cNvPr>
-          <p:cNvSpPr>
-            <a:spLocks noGrp="1"/>
-          </p:cNvSpPr>
-          <p:nvPr>
-            <p:ph type="body" idx="1"/>
-          </p:nvPr>
-        </p:nvSpPr>
-        <p:spPr/>
-        <p:txBody>
-          <a:bodyPr/>
-          <a:lstStyle/>
-          <a:p>
-            <a:pPr marL="76200" indent="0">
-              <a:buNone/>
-            </a:pPr>
-            <a:endParaRPr lang="en-US" dirty="0"/>
-          </a:p>
-          <a:p>
-            <a:pPr marL="76200" indent="0">
-              <a:buNone/>
-            </a:pPr>
-            <a:endParaRPr lang="en-US" dirty="0"/>
-          </a:p>
-          <a:p>
-            <a:pPr marL="76200" indent="0">
-              <a:buNone/>
-            </a:pPr>
-            <a:r>
-              <a:rPr lang="en-US" sz="3200" dirty="0"/>
-              <a:t>What are downstream impacts (generally) of a false positive in record linkage? What about a false negative?</a:t>
-            </a:r>
-            <a:endParaRPr lang="en-US" dirty="0"/>
-          </a:p>
-        </p:txBody>
-      </p:sp>
-    </p:spTree>
-    <p:extLst>
-      <p:ext uri="{BB962C8B-B14F-4D97-AF65-F5344CB8AC3E}">
-        <p14:creationId xmlns:p14="http://schemas.microsoft.com/office/powerpoint/2010/main" val="4210785574"/>
-      </p:ext>
-    </p:extLst>
-  </p:cSld>
-  <p:clrMapOvr>
-    <a:masterClrMapping/>
-  </p:clrMapOvr>
-</p:sld>
-</file>
-
-<file path=ppt/slides/slide22.xml><?xml version="1.0" encoding="utf-8"?>
-<p:sld xmlns:a="http://schemas.openxmlformats.org/drawingml/2006/main" xmlns:r="http://schemas.openxmlformats.org/officeDocument/2006/relationships" xmlns:p="http://schemas.openxmlformats.org/presentationml/2006/main">
-  <p:cSld>
-    <p:spTree>
-      <p:nvGrpSpPr>
-        <p:cNvPr id="1" name=""/>
-        <p:cNvGrpSpPr/>
-        <p:nvPr/>
-      </p:nvGrpSpPr>
-      <p:grpSpPr>
-        <a:xfrm>
-          <a:off x="0" y="0"/>
-          <a:ext cx="0" cy="0"/>
-          <a:chOff x="0" y="0"/>
-          <a:chExt cx="0" cy="0"/>
-        </a:xfrm>
-      </p:grpSpPr>
-      <p:sp>
-        <p:nvSpPr>
-          <p:cNvPr id="2" name="Title 1">
-            <a:extLst>
-              <a:ext uri="{FF2B5EF4-FFF2-40B4-BE49-F238E27FC236}">
-                <a16:creationId xmlns:a16="http://schemas.microsoft.com/office/drawing/2014/main" id="{52E04EB1-290D-E647-B684-F8A3D3B280EE}"/>
-              </a:ext>
-            </a:extLst>
-          </p:cNvPr>
-          <p:cNvSpPr>
-            <a:spLocks noGrp="1"/>
-          </p:cNvSpPr>
-          <p:nvPr>
-            <p:ph type="title"/>
-          </p:nvPr>
-        </p:nvSpPr>
-        <p:spPr/>
-        <p:txBody>
-          <a:bodyPr/>
-          <a:lstStyle/>
-          <a:p>
-            <a:r>
-              <a:rPr lang="en-US" dirty="0"/>
-              <a:t>Discussion Topic</a:t>
-            </a:r>
-          </a:p>
-        </p:txBody>
-      </p:sp>
-      <p:sp>
-        <p:nvSpPr>
-          <p:cNvPr id="3" name="Text Placeholder 2">
-            <a:extLst>
-              <a:ext uri="{FF2B5EF4-FFF2-40B4-BE49-F238E27FC236}">
-                <a16:creationId xmlns:a16="http://schemas.microsoft.com/office/drawing/2014/main" id="{73DF5889-4B8C-7449-87CD-1929C07EE849}"/>
-              </a:ext>
-            </a:extLst>
-          </p:cNvPr>
-          <p:cNvSpPr>
-            <a:spLocks noGrp="1"/>
-          </p:cNvSpPr>
-          <p:nvPr>
-            <p:ph type="body" idx="1"/>
-          </p:nvPr>
-        </p:nvSpPr>
-        <p:spPr/>
-        <p:txBody>
-          <a:bodyPr/>
-          <a:lstStyle/>
-          <a:p>
-            <a:pPr marL="76200" indent="0">
-              <a:buNone/>
-            </a:pPr>
-            <a:endParaRPr lang="en-US" dirty="0"/>
-          </a:p>
-          <a:p>
-            <a:pPr marL="76200" indent="0">
-              <a:buNone/>
-            </a:pPr>
-            <a:endParaRPr lang="en-US" dirty="0"/>
-          </a:p>
-          <a:p>
-            <a:pPr marL="76200" indent="0">
-              <a:buNone/>
-            </a:pPr>
-            <a:r>
-              <a:rPr lang="en-US" sz="3200" dirty="0"/>
-              <a:t>What types of common mismatch errors might affect groups differently, resulting in downstream fairness impacts?</a:t>
-            </a:r>
-            <a:endParaRPr lang="en-US" dirty="0"/>
-          </a:p>
-        </p:txBody>
-      </p:sp>
-    </p:spTree>
-    <p:extLst>
-      <p:ext uri="{BB962C8B-B14F-4D97-AF65-F5344CB8AC3E}">
-        <p14:creationId xmlns:p14="http://schemas.microsoft.com/office/powerpoint/2010/main" val="2960122765"/>
-      </p:ext>
-    </p:extLst>
-  </p:cSld>
-  <p:clrMapOvr>
-    <a:masterClrMapping/>
-  </p:clrMapOvr>
-</p:sld>
-</file>
-
-<file path=ppt/slides/slide23.xml><?xml version="1.0" encoding="utf-8"?>
-<p:sld xmlns:a="http://schemas.openxmlformats.org/drawingml/2006/main" xmlns:r="http://schemas.openxmlformats.org/officeDocument/2006/relationships" xmlns:p="http://schemas.openxmlformats.org/presentationml/2006/main">
-  <p:cSld>
-    <p:spTree>
-      <p:nvGrpSpPr>
-        <p:cNvPr id="1" name=""/>
-        <p:cNvGrpSpPr/>
-        <p:nvPr/>
-      </p:nvGrpSpPr>
-      <p:grpSpPr>
-        <a:xfrm>
-          <a:off x="0" y="0"/>
-          <a:ext cx="0" cy="0"/>
-          <a:chOff x="0" y="0"/>
-          <a:chExt cx="0" cy="0"/>
-        </a:xfrm>
-      </p:grpSpPr>
-      <p:sp>
-        <p:nvSpPr>
-          <p:cNvPr id="2" name="Title 1"/>
-          <p:cNvSpPr>
-            <a:spLocks noGrp="1"/>
-          </p:cNvSpPr>
-          <p:nvPr>
-            <p:ph type="title"/>
-          </p:nvPr>
-        </p:nvSpPr>
-        <p:spPr/>
-        <p:txBody>
-          <a:bodyPr/>
-          <a:lstStyle/>
-          <a:p>
-            <a:r>
-              <a:rPr lang="en-US" dirty="0"/>
-              <a:t>Factors to consider</a:t>
-            </a:r>
-          </a:p>
-        </p:txBody>
-      </p:sp>
-      <p:sp>
-        <p:nvSpPr>
-          <p:cNvPr id="3" name="Content Placeholder 2"/>
-          <p:cNvSpPr>
-            <a:spLocks noGrp="1"/>
-          </p:cNvSpPr>
-          <p:nvPr>
-            <p:ph type="body" idx="1"/>
-          </p:nvPr>
-        </p:nvSpPr>
-        <p:spPr/>
-        <p:txBody>
-          <a:bodyPr>
-            <a:normAutofit fontScale="77500" lnSpcReduction="20000"/>
-          </a:bodyPr>
-          <a:lstStyle/>
-          <a:p>
-            <a:r>
-              <a:rPr lang="en-US" dirty="0" err="1"/>
-              <a:t>Deduping</a:t>
-            </a:r>
-            <a:r>
-              <a:rPr lang="en-US" dirty="0"/>
-              <a:t> or Linkage</a:t>
-            </a:r>
-          </a:p>
-          <a:p>
-            <a:pPr lvl="1"/>
-            <a:r>
-              <a:rPr lang="en-US" dirty="0"/>
-              <a:t>1-1 or 1-many or many-1</a:t>
-            </a:r>
-          </a:p>
-          <a:p>
-            <a:pPr lvl="1"/>
-            <a:endParaRPr lang="en-US" dirty="0"/>
-          </a:p>
-          <a:p>
-            <a:r>
-              <a:rPr lang="en-US" dirty="0"/>
-              <a:t>Rule-based or ML based</a:t>
-            </a:r>
-          </a:p>
-          <a:p>
-            <a:pPr lvl="1"/>
-            <a:r>
-              <a:rPr lang="en-US" dirty="0"/>
-              <a:t>Do you have labeled training data?</a:t>
-            </a:r>
-          </a:p>
-          <a:p>
-            <a:pPr lvl="1"/>
-            <a:endParaRPr lang="en-US" dirty="0"/>
-          </a:p>
-          <a:p>
-            <a:r>
-              <a:rPr lang="en-US" dirty="0"/>
-              <a:t>Domain specific or generic similarity metrics?</a:t>
-            </a:r>
-          </a:p>
-          <a:p>
-            <a:endParaRPr lang="en-US" dirty="0"/>
-          </a:p>
-          <a:p>
-            <a:r>
-              <a:rPr lang="en-US" dirty="0"/>
-              <a:t>Evaluation metric</a:t>
-            </a:r>
-          </a:p>
-          <a:p>
-            <a:pPr lvl="1"/>
-            <a:r>
-              <a:rPr lang="en-US" dirty="0"/>
-              <a:t>Precision or recall</a:t>
-            </a:r>
-          </a:p>
-          <a:p>
-            <a:pPr lvl="1"/>
-            <a:r>
-              <a:rPr lang="en-US" dirty="0"/>
-              <a:t>Task-specific - Implications on future analysis (bias for example)</a:t>
-            </a:r>
-          </a:p>
-        </p:txBody>
-      </p:sp>
-    </p:spTree>
-    <p:extLst>
-      <p:ext uri="{BB962C8B-B14F-4D97-AF65-F5344CB8AC3E}">
-        <p14:creationId xmlns:p14="http://schemas.microsoft.com/office/powerpoint/2010/main" val="562180733"/>
-      </p:ext>
-    </p:extLst>
-  </p:cSld>
-  <p:clrMapOvr>
-    <a:masterClrMapping/>
-  </p:clrMapOvr>
-</p:sld>
-</file>
-
-<file path=ppt/slides/slide24.xml><?xml version="1.0" encoding="utf-8"?>
-<p:sld xmlns:a="http://schemas.openxmlformats.org/drawingml/2006/main" xmlns:r="http://schemas.openxmlformats.org/officeDocument/2006/relationships" xmlns:p="http://schemas.openxmlformats.org/presentationml/2006/main">
-  <p:cSld>
-    <p:spTree>
-      <p:nvGrpSpPr>
-        <p:cNvPr id="1" name=""/>
-        <p:cNvGrpSpPr/>
-        <p:nvPr/>
-      </p:nvGrpSpPr>
-      <p:grpSpPr>
-        <a:xfrm>
-          <a:off x="0" y="0"/>
-          <a:ext cx="0" cy="0"/>
-          <a:chOff x="0" y="0"/>
-          <a:chExt cx="0" cy="0"/>
-        </a:xfrm>
-      </p:grpSpPr>
-      <p:sp>
-        <p:nvSpPr>
-          <p:cNvPr id="9218" name="Rectangle 2"/>
-          <p:cNvSpPr>
-            <a:spLocks noGrp="1" noChangeArrowheads="1"/>
-          </p:cNvSpPr>
-          <p:nvPr>
-            <p:ph type="title"/>
-          </p:nvPr>
-        </p:nvSpPr>
-        <p:spPr/>
-        <p:txBody>
-          <a:bodyPr/>
-          <a:lstStyle/>
-          <a:p>
-            <a:r>
-              <a:rPr lang="en-US" altLang="en-US" dirty="0"/>
-              <a:t>Approaches</a:t>
-            </a:r>
-          </a:p>
-        </p:txBody>
-      </p:sp>
-      <p:sp>
-        <p:nvSpPr>
-          <p:cNvPr id="9219" name="Rectangle 3"/>
-          <p:cNvSpPr>
-            <a:spLocks noGrp="1" noChangeArrowheads="1"/>
-          </p:cNvSpPr>
-          <p:nvPr>
-            <p:ph type="body" idx="1"/>
-          </p:nvPr>
-        </p:nvSpPr>
-        <p:spPr/>
-        <p:txBody>
-          <a:bodyPr>
-            <a:normAutofit/>
-          </a:bodyPr>
-          <a:lstStyle/>
-          <a:p>
-            <a:r>
-              <a:rPr lang="en-US" altLang="en-US" dirty="0"/>
-              <a:t>Exact matching</a:t>
-            </a:r>
-          </a:p>
-          <a:p>
-            <a:r>
-              <a:rPr lang="en-US" altLang="en-US" dirty="0"/>
-              <a:t>Rule-based</a:t>
-            </a:r>
-          </a:p>
-          <a:p>
-            <a:r>
-              <a:rPr lang="en-US" altLang="en-US" dirty="0"/>
-              <a:t>Probabilistic linkage</a:t>
-            </a:r>
-          </a:p>
-        </p:txBody>
-      </p:sp>
-    </p:spTree>
-    <p:extLst>
-      <p:ext uri="{BB962C8B-B14F-4D97-AF65-F5344CB8AC3E}">
-        <p14:creationId xmlns:p14="http://schemas.microsoft.com/office/powerpoint/2010/main" val="2383065332"/>
-      </p:ext>
-    </p:extLst>
-  </p:cSld>
-  <p:clrMapOvr>
-    <a:masterClrMapping/>
-  </p:clrMapOvr>
-</p:sld>
-</file>
-
-<file path=ppt/slides/slide25.xml><?xml version="1.0" encoding="utf-8"?>
-<p:sld xmlns:a="http://schemas.openxmlformats.org/drawingml/2006/main" xmlns:r="http://schemas.openxmlformats.org/officeDocument/2006/relationships" xmlns:p="http://schemas.openxmlformats.org/presentationml/2006/main">
-  <p:cSld>
-    <p:spTree>
-      <p:nvGrpSpPr>
-        <p:cNvPr id="1" name=""/>
-        <p:cNvGrpSpPr/>
-        <p:nvPr/>
-      </p:nvGrpSpPr>
-      <p:grpSpPr>
-        <a:xfrm>
-          <a:off x="0" y="0"/>
-          <a:ext cx="0" cy="0"/>
-          <a:chOff x="0" y="0"/>
-          <a:chExt cx="0" cy="0"/>
-        </a:xfrm>
-      </p:grpSpPr>
-      <p:sp>
-        <p:nvSpPr>
-          <p:cNvPr id="2" name="Title 1"/>
-          <p:cNvSpPr>
-            <a:spLocks noGrp="1"/>
-          </p:cNvSpPr>
-          <p:nvPr>
-            <p:ph type="title"/>
-          </p:nvPr>
-        </p:nvSpPr>
-        <p:spPr/>
-        <p:txBody>
-          <a:bodyPr/>
-          <a:lstStyle/>
-          <a:p>
-            <a:r>
-              <a:rPr lang="en-US" dirty="0"/>
-              <a:t>When are two records about the same entity?</a:t>
-            </a:r>
-          </a:p>
-        </p:txBody>
-      </p:sp>
-      <p:sp>
-        <p:nvSpPr>
-          <p:cNvPr id="3" name="Content Placeholder 2"/>
-          <p:cNvSpPr>
-            <a:spLocks noGrp="1"/>
-          </p:cNvSpPr>
-          <p:nvPr>
-            <p:ph type="body" idx="1"/>
-          </p:nvPr>
-        </p:nvSpPr>
-        <p:spPr/>
-        <p:txBody>
-          <a:bodyPr/>
-          <a:lstStyle/>
-          <a:p>
-            <a:r>
-              <a:rPr lang="en-US" dirty="0"/>
-              <a:t>Examples of possible similarity metrics</a:t>
-            </a:r>
-          </a:p>
-          <a:p>
-            <a:pPr lvl="1"/>
-            <a:r>
-              <a:rPr lang="en-US" dirty="0"/>
-              <a:t>Edit distance</a:t>
-            </a:r>
-          </a:p>
-          <a:p>
-            <a:pPr lvl="1"/>
-            <a:r>
-              <a:rPr lang="en-US" dirty="0" err="1"/>
-              <a:t>Soundex</a:t>
-            </a:r>
-            <a:endParaRPr lang="en-US" dirty="0"/>
-          </a:p>
-          <a:p>
-            <a:endParaRPr lang="en-US" dirty="0"/>
-          </a:p>
-        </p:txBody>
-      </p:sp>
-    </p:spTree>
-    <p:extLst>
-      <p:ext uri="{BB962C8B-B14F-4D97-AF65-F5344CB8AC3E}">
-        <p14:creationId xmlns:p14="http://schemas.microsoft.com/office/powerpoint/2010/main" val="32033496"/>
-      </p:ext>
-    </p:extLst>
-  </p:cSld>
-  <p:clrMapOvr>
-    <a:masterClrMapping/>
-  </p:clrMapOvr>
-</p:sld>
-</file>
-
-<file path=ppt/slides/slide26.xml><?xml version="1.0" encoding="utf-8"?>
-<p:sld xmlns:a="http://schemas.openxmlformats.org/drawingml/2006/main" xmlns:r="http://schemas.openxmlformats.org/officeDocument/2006/relationships" xmlns:p="http://schemas.openxmlformats.org/presentationml/2006/main">
-  <p:cSld>
-    <p:spTree>
-      <p:nvGrpSpPr>
-        <p:cNvPr id="1" name=""/>
-        <p:cNvGrpSpPr/>
-        <p:nvPr/>
-      </p:nvGrpSpPr>
-      <p:grpSpPr>
-        <a:xfrm>
-          <a:off x="0" y="0"/>
-          <a:ext cx="0" cy="0"/>
-          <a:chOff x="0" y="0"/>
-          <a:chExt cx="0" cy="0"/>
-        </a:xfrm>
-      </p:grpSpPr>
-      <p:sp>
-        <p:nvSpPr>
-          <p:cNvPr id="2" name="Title 1"/>
-          <p:cNvSpPr>
-            <a:spLocks noGrp="1"/>
-          </p:cNvSpPr>
-          <p:nvPr>
-            <p:ph type="title"/>
-          </p:nvPr>
-        </p:nvSpPr>
-        <p:spPr/>
-        <p:txBody>
-          <a:bodyPr/>
-          <a:lstStyle/>
-          <a:p>
-            <a:r>
-              <a:rPr lang="en-US" dirty="0"/>
-              <a:t>“Fuzzy” Matching System	</a:t>
-            </a:r>
-          </a:p>
-        </p:txBody>
-      </p:sp>
-      <p:sp>
-        <p:nvSpPr>
-          <p:cNvPr id="3" name="Content Placeholder 2"/>
-          <p:cNvSpPr>
-            <a:spLocks noGrp="1"/>
-          </p:cNvSpPr>
-          <p:nvPr>
-            <p:ph type="body" idx="1"/>
-          </p:nvPr>
-        </p:nvSpPr>
-        <p:spPr/>
-        <p:txBody>
-          <a:bodyPr/>
-          <a:lstStyle/>
-          <a:p>
-            <a:r>
-              <a:rPr lang="en-US" dirty="0"/>
-              <a:t>Apply set of cascading rules</a:t>
-            </a:r>
-          </a:p>
-          <a:p>
-            <a:r>
-              <a:rPr lang="en-US" dirty="0"/>
-              <a:t>Assign confidence score based on which rules fire</a:t>
-            </a:r>
-          </a:p>
-        </p:txBody>
-      </p:sp>
-    </p:spTree>
-    <p:extLst>
-      <p:ext uri="{BB962C8B-B14F-4D97-AF65-F5344CB8AC3E}">
-        <p14:creationId xmlns:p14="http://schemas.microsoft.com/office/powerpoint/2010/main" val="2363932908"/>
-      </p:ext>
-    </p:extLst>
-  </p:cSld>
-  <p:clrMapOvr>
-    <a:masterClrMapping/>
-  </p:clrMapOvr>
-</p:sld>
-</file>
-
-<file path=ppt/slides/slide27.xml><?xml version="1.0" encoding="utf-8"?>
-<p:sld xmlns:a="http://schemas.openxmlformats.org/drawingml/2006/main" xmlns:r="http://schemas.openxmlformats.org/officeDocument/2006/relationships" xmlns:p="http://schemas.openxmlformats.org/presentationml/2006/main">
-  <p:cSld>
-    <p:spTree>
-      <p:nvGrpSpPr>
-        <p:cNvPr id="1" name=""/>
-        <p:cNvGrpSpPr/>
-        <p:nvPr/>
-      </p:nvGrpSpPr>
-      <p:grpSpPr>
-        <a:xfrm>
-          <a:off x="0" y="0"/>
-          <a:ext cx="0" cy="0"/>
-          <a:chOff x="0" y="0"/>
-          <a:chExt cx="0" cy="0"/>
-        </a:xfrm>
-      </p:grpSpPr>
-      <p:sp>
-        <p:nvSpPr>
-          <p:cNvPr id="35842" name="Rectangle 2"/>
-          <p:cNvSpPr>
-            <a:spLocks noGrp="1" noChangeArrowheads="1"/>
-          </p:cNvSpPr>
-          <p:nvPr>
-            <p:ph type="title"/>
-          </p:nvPr>
-        </p:nvSpPr>
-        <p:spPr/>
-        <p:txBody>
-          <a:bodyPr/>
-          <a:lstStyle/>
-          <a:p>
-            <a:r>
-              <a:rPr lang="en-US" altLang="en-US" dirty="0"/>
-              <a:t>How do we not compare every pair?</a:t>
-            </a:r>
-          </a:p>
-        </p:txBody>
-      </p:sp>
-      <p:sp>
-        <p:nvSpPr>
-          <p:cNvPr id="35843" name="Rectangle 3"/>
-          <p:cNvSpPr>
-            <a:spLocks noGrp="1" noChangeArrowheads="1"/>
-          </p:cNvSpPr>
-          <p:nvPr>
-            <p:ph type="body" idx="1"/>
-          </p:nvPr>
-        </p:nvSpPr>
-        <p:spPr/>
-        <p:txBody>
-          <a:bodyPr/>
-          <a:lstStyle/>
-          <a:p>
-            <a:pPr>
-              <a:lnSpc>
-                <a:spcPct val="90000"/>
-              </a:lnSpc>
-            </a:pPr>
-            <a:r>
-              <a:rPr lang="en-US" altLang="en-US" sz="2800" dirty="0"/>
-              <a:t>How do we avoid looking at |A| * |B| pairs?</a:t>
-            </a:r>
-          </a:p>
-          <a:p>
-            <a:pPr>
-              <a:lnSpc>
-                <a:spcPct val="90000"/>
-              </a:lnSpc>
-            </a:pPr>
-            <a:r>
-              <a:rPr lang="en-US" altLang="en-US" sz="2800" i="1" dirty="0"/>
-              <a:t>Blocking: </a:t>
-            </a:r>
-            <a:r>
-              <a:rPr lang="en-US" altLang="en-US" sz="2800" dirty="0"/>
-              <a:t>choose a smaller set of pairs that will contain all or most matches.  </a:t>
-            </a:r>
-          </a:p>
-          <a:p>
-            <a:pPr lvl="1">
-              <a:lnSpc>
-                <a:spcPct val="90000"/>
-              </a:lnSpc>
-            </a:pPr>
-            <a:r>
-              <a:rPr lang="en-US" altLang="en-US" sz="2400" dirty="0"/>
-              <a:t>Simple blocking:  compare all pairs that “hash” to the same value (e.g., same </a:t>
-            </a:r>
-            <a:r>
-              <a:rPr lang="en-US" altLang="en-US" sz="2400" dirty="0" err="1"/>
-              <a:t>Soundex</a:t>
-            </a:r>
-            <a:r>
-              <a:rPr lang="en-US" altLang="en-US" sz="2400" dirty="0"/>
-              <a:t> code for last name, same birth year)</a:t>
-            </a:r>
-          </a:p>
-          <a:p>
-            <a:pPr lvl="1">
-              <a:lnSpc>
-                <a:spcPct val="90000"/>
-              </a:lnSpc>
-            </a:pPr>
-            <a:r>
-              <a:rPr lang="en-US" altLang="en-US" sz="2400" dirty="0"/>
-              <a:t>Extensions (to increase </a:t>
-            </a:r>
-            <a:r>
-              <a:rPr lang="en-US" altLang="en-US" sz="2400" i="1" dirty="0"/>
-              <a:t>recall </a:t>
-            </a:r>
-            <a:r>
-              <a:rPr lang="en-US" altLang="en-US" sz="2400" dirty="0"/>
-              <a:t>of set of pairs):</a:t>
-            </a:r>
-          </a:p>
-          <a:p>
-            <a:pPr lvl="2">
-              <a:lnSpc>
-                <a:spcPct val="90000"/>
-              </a:lnSpc>
-            </a:pPr>
-            <a:r>
-              <a:rPr lang="en-US" altLang="en-US" sz="2000" dirty="0"/>
-              <a:t>Block on </a:t>
-            </a:r>
-            <a:r>
-              <a:rPr lang="en-US" altLang="en-US" sz="2000" i="1" dirty="0"/>
-              <a:t>multiple</a:t>
-            </a:r>
-            <a:r>
-              <a:rPr lang="en-US" altLang="en-US" sz="2000" dirty="0"/>
-              <a:t> attributes (</a:t>
-            </a:r>
-            <a:r>
-              <a:rPr lang="en-US" altLang="en-US" sz="2000" dirty="0" err="1"/>
-              <a:t>soundex</a:t>
-            </a:r>
-            <a:r>
-              <a:rPr lang="en-US" altLang="en-US" sz="2000" dirty="0"/>
-              <a:t>, zip code) and take union of all pairs found.</a:t>
-            </a:r>
-          </a:p>
-          <a:p>
-            <a:pPr lvl="2">
-              <a:lnSpc>
-                <a:spcPct val="90000"/>
-              </a:lnSpc>
-            </a:pPr>
-            <a:r>
-              <a:rPr lang="en-US" altLang="en-US" sz="2000" i="1" dirty="0"/>
-              <a:t>Windowing:</a:t>
-            </a:r>
-            <a:r>
-              <a:rPr lang="en-US" altLang="en-US" sz="2000" dirty="0"/>
-              <a:t> Pick (numerically or lexically) </a:t>
-            </a:r>
-            <a:r>
-              <a:rPr lang="en-US" altLang="en-US" sz="2000" i="1" dirty="0"/>
-              <a:t>ordered</a:t>
-            </a:r>
-            <a:r>
-              <a:rPr lang="en-US" altLang="en-US" sz="2000" dirty="0"/>
-              <a:t> attributes and sort (e.g., sort on last name).  The pick all pairs that appear “near” each other in the sorted order.</a:t>
-            </a:r>
-          </a:p>
-        </p:txBody>
-      </p:sp>
-    </p:spTree>
-    <p:extLst>
-      <p:ext uri="{BB962C8B-B14F-4D97-AF65-F5344CB8AC3E}">
-        <p14:creationId xmlns:p14="http://schemas.microsoft.com/office/powerpoint/2010/main" val="3772462634"/>
-      </p:ext>
-    </p:extLst>
-  </p:cSld>
-  <p:clrMapOvr>
-    <a:masterClrMapping/>
-  </p:clrMapOvr>
-</p:sld>
-</file>
-
-<file path=ppt/slides/slide28.xml><?xml version="1.0" encoding="utf-8"?>
-<p:sld xmlns:a="http://schemas.openxmlformats.org/drawingml/2006/main" xmlns:r="http://schemas.openxmlformats.org/officeDocument/2006/relationships" xmlns:p="http://schemas.openxmlformats.org/presentationml/2006/main">
-  <p:cSld>
-    <p:spTree>
-      <p:nvGrpSpPr>
-        <p:cNvPr id="1" name=""/>
-        <p:cNvGrpSpPr/>
-        <p:nvPr/>
-      </p:nvGrpSpPr>
-      <p:grpSpPr>
-        <a:xfrm>
-          <a:off x="0" y="0"/>
-          <a:ext cx="0" cy="0"/>
-          <a:chOff x="0" y="0"/>
-          <a:chExt cx="0" cy="0"/>
-        </a:xfrm>
-      </p:grpSpPr>
-      <p:sp>
-        <p:nvSpPr>
-          <p:cNvPr id="2" name="Title 1"/>
-          <p:cNvSpPr>
-            <a:spLocks noGrp="1"/>
-          </p:cNvSpPr>
-          <p:nvPr>
-            <p:ph type="title"/>
-          </p:nvPr>
-        </p:nvSpPr>
-        <p:spPr/>
-        <p:txBody>
-          <a:bodyPr/>
-          <a:lstStyle/>
-          <a:p>
-            <a:r>
-              <a:rPr lang="en-US" dirty="0"/>
-              <a:t>Machine Learning based Record Linkage</a:t>
-            </a:r>
-          </a:p>
-        </p:txBody>
-      </p:sp>
-      <p:sp>
-        <p:nvSpPr>
-          <p:cNvPr id="3" name="Content Placeholder 2"/>
-          <p:cNvSpPr>
-            <a:spLocks noGrp="1"/>
-          </p:cNvSpPr>
-          <p:nvPr>
-            <p:ph type="body" idx="1"/>
-          </p:nvPr>
-        </p:nvSpPr>
-        <p:spPr/>
-        <p:txBody>
-          <a:bodyPr/>
-          <a:lstStyle/>
-          <a:p>
-            <a:r>
-              <a:rPr lang="en-US" dirty="0"/>
-              <a:t>Generate training data</a:t>
-            </a:r>
-          </a:p>
-          <a:p>
-            <a:pPr lvl="1"/>
-            <a:r>
-              <a:rPr lang="en-US" dirty="0"/>
-              <a:t>Label pairs as match/no match</a:t>
-            </a:r>
-          </a:p>
-          <a:p>
-            <a:pPr lvl="1"/>
-            <a:endParaRPr lang="en-US" dirty="0"/>
-          </a:p>
-          <a:p>
-            <a:r>
-              <a:rPr lang="en-US" dirty="0"/>
-              <a:t>Generate features over each pair</a:t>
-            </a:r>
-          </a:p>
-          <a:p>
-            <a:pPr lvl="1"/>
-            <a:r>
-              <a:rPr lang="en-US" dirty="0"/>
-              <a:t>Distance metrics over different attributes (</a:t>
-            </a:r>
-            <a:r>
-              <a:rPr lang="en-US" dirty="0" err="1"/>
-              <a:t>fname</a:t>
-            </a:r>
-            <a:r>
-              <a:rPr lang="en-US" dirty="0"/>
-              <a:t>, </a:t>
-            </a:r>
-            <a:r>
-              <a:rPr lang="en-US" dirty="0" err="1"/>
-              <a:t>lname</a:t>
-            </a:r>
-            <a:r>
-              <a:rPr lang="en-US" dirty="0"/>
-              <a:t>, dob, etc.)</a:t>
-            </a:r>
-          </a:p>
-          <a:p>
-            <a:pPr lvl="1"/>
-            <a:r>
-              <a:rPr lang="en-US" dirty="0" err="1"/>
-              <a:t>Tfidf</a:t>
-            </a:r>
-            <a:r>
-              <a:rPr lang="en-US" dirty="0"/>
-              <a:t> scores</a:t>
-            </a:r>
-          </a:p>
-          <a:p>
-            <a:pPr lvl="1"/>
-            <a:endParaRPr lang="en-US" dirty="0"/>
-          </a:p>
-          <a:p>
-            <a:r>
-              <a:rPr lang="en-US" dirty="0"/>
-              <a:t>Build and evaluate classifiers</a:t>
-            </a:r>
-          </a:p>
-        </p:txBody>
-      </p:sp>
-    </p:spTree>
-    <p:extLst>
-      <p:ext uri="{BB962C8B-B14F-4D97-AF65-F5344CB8AC3E}">
-        <p14:creationId xmlns:p14="http://schemas.microsoft.com/office/powerpoint/2010/main" val="1221298556"/>
-      </p:ext>
-    </p:extLst>
-  </p:cSld>
-  <p:clrMapOvr>
-    <a:masterClrMapping/>
-  </p:clrMapOvr>
-</p:sld>
-</file>
-
-<file path=ppt/slides/slide29.xml><?xml version="1.0" encoding="utf-8"?>
-<p:sld xmlns:a="http://schemas.openxmlformats.org/drawingml/2006/main" xmlns:r="http://schemas.openxmlformats.org/officeDocument/2006/relationships" xmlns:p="http://schemas.openxmlformats.org/presentationml/2006/main">
-  <p:cSld>
-    <p:spTree>
-      <p:nvGrpSpPr>
-        <p:cNvPr id="1" name=""/>
-        <p:cNvGrpSpPr/>
-        <p:nvPr/>
-      </p:nvGrpSpPr>
-      <p:grpSpPr>
-        <a:xfrm>
-          <a:off x="0" y="0"/>
-          <a:ext cx="0" cy="0"/>
-          <a:chOff x="0" y="0"/>
-          <a:chExt cx="0" cy="0"/>
-        </a:xfrm>
-      </p:grpSpPr>
-      <p:sp>
-        <p:nvSpPr>
-          <p:cNvPr id="2" name="Title 1">
-            <a:extLst>
-              <a:ext uri="{FF2B5EF4-FFF2-40B4-BE49-F238E27FC236}">
-                <a16:creationId xmlns:a16="http://schemas.microsoft.com/office/drawing/2014/main" id="{14850FF5-E8EC-234D-805C-399C5033051A}"/>
-              </a:ext>
-            </a:extLst>
-          </p:cNvPr>
-          <p:cNvSpPr>
-            <a:spLocks noGrp="1"/>
-          </p:cNvSpPr>
-          <p:nvPr>
-            <p:ph type="title"/>
-          </p:nvPr>
-        </p:nvSpPr>
-        <p:spPr/>
-        <p:txBody>
-          <a:bodyPr/>
-          <a:lstStyle/>
-          <a:p>
-            <a:r>
-              <a:rPr lang="en-US" dirty="0"/>
-              <a:t>One-off versus recurring matching</a:t>
-            </a:r>
-          </a:p>
-        </p:txBody>
-      </p:sp>
-      <p:sp>
-        <p:nvSpPr>
-          <p:cNvPr id="3" name="Text Placeholder 2">
-            <a:extLst>
-              <a:ext uri="{FF2B5EF4-FFF2-40B4-BE49-F238E27FC236}">
-                <a16:creationId xmlns:a16="http://schemas.microsoft.com/office/drawing/2014/main" id="{0CD32BE4-76DA-C042-A3E3-35B452F39303}"/>
-              </a:ext>
-            </a:extLst>
-          </p:cNvPr>
-          <p:cNvSpPr>
-            <a:spLocks noGrp="1"/>
-          </p:cNvSpPr>
-          <p:nvPr>
-            <p:ph type="body" idx="1"/>
-          </p:nvPr>
-        </p:nvSpPr>
-        <p:spPr/>
-        <p:txBody>
-          <a:bodyPr/>
-          <a:lstStyle/>
-          <a:p>
-            <a:r>
-              <a:rPr lang="en-US" dirty="0"/>
-              <a:t>Unique identifiers: persistence?</a:t>
-            </a:r>
-          </a:p>
-          <a:p>
-            <a:endParaRPr lang="en-US" dirty="0"/>
-          </a:p>
-          <a:p>
-            <a:r>
-              <a:rPr lang="en-US" dirty="0"/>
-              <a:t>What do we do with new or changed pairs?</a:t>
-            </a:r>
-          </a:p>
-        </p:txBody>
-      </p:sp>
-    </p:spTree>
-    <p:extLst>
-      <p:ext uri="{BB962C8B-B14F-4D97-AF65-F5344CB8AC3E}">
-        <p14:creationId xmlns:p14="http://schemas.microsoft.com/office/powerpoint/2010/main" val="834575629"/>
       </p:ext>
     </p:extLst>
   </p:cSld>
@@ -17238,269 +15576,6 @@
     <p:extLst>
       <p:ext uri="{BB962C8B-B14F-4D97-AF65-F5344CB8AC3E}">
         <p14:creationId xmlns:p14="http://schemas.microsoft.com/office/powerpoint/2010/main" val="2624855364"/>
-      </p:ext>
-    </p:extLst>
-  </p:cSld>
-  <p:clrMapOvr>
-    <a:masterClrMapping/>
-  </p:clrMapOvr>
-</p:sld>
-</file>
-
-<file path=ppt/slides/slide30.xml><?xml version="1.0" encoding="utf-8"?>
-<p:sld xmlns:a="http://schemas.openxmlformats.org/drawingml/2006/main" xmlns:r="http://schemas.openxmlformats.org/officeDocument/2006/relationships" xmlns:p="http://schemas.openxmlformats.org/presentationml/2006/main">
-  <p:cSld>
-    <p:spTree>
-      <p:nvGrpSpPr>
-        <p:cNvPr id="1" name=""/>
-        <p:cNvGrpSpPr/>
-        <p:nvPr/>
-      </p:nvGrpSpPr>
-      <p:grpSpPr>
-        <a:xfrm>
-          <a:off x="0" y="0"/>
-          <a:ext cx="0" cy="0"/>
-          <a:chOff x="0" y="0"/>
-          <a:chExt cx="0" cy="0"/>
-        </a:xfrm>
-      </p:grpSpPr>
-      <p:sp>
-        <p:nvSpPr>
-          <p:cNvPr id="2" name="Title 1">
-            <a:extLst>
-              <a:ext uri="{FF2B5EF4-FFF2-40B4-BE49-F238E27FC236}">
-                <a16:creationId xmlns:a16="http://schemas.microsoft.com/office/drawing/2014/main" id="{BEFC7EB6-E3A6-F21F-0D18-5853E434A32C}"/>
-              </a:ext>
-            </a:extLst>
-          </p:cNvPr>
-          <p:cNvSpPr>
-            <a:spLocks noGrp="1"/>
-          </p:cNvSpPr>
-          <p:nvPr>
-            <p:ph type="title"/>
-          </p:nvPr>
-        </p:nvSpPr>
-        <p:spPr/>
-        <p:txBody>
-          <a:bodyPr/>
-          <a:lstStyle/>
-          <a:p>
-            <a:r>
-              <a:rPr lang="en-US" dirty="0"/>
-              <a:t>Implications for your project</a:t>
-            </a:r>
-          </a:p>
-        </p:txBody>
-      </p:sp>
-      <p:sp>
-        <p:nvSpPr>
-          <p:cNvPr id="3" name="Text Placeholder 2">
-            <a:extLst>
-              <a:ext uri="{FF2B5EF4-FFF2-40B4-BE49-F238E27FC236}">
-                <a16:creationId xmlns:a16="http://schemas.microsoft.com/office/drawing/2014/main" id="{F7A6A9A7-FDC5-5263-7786-D807574B598C}"/>
-              </a:ext>
-            </a:extLst>
-          </p:cNvPr>
-          <p:cNvSpPr>
-            <a:spLocks noGrp="1"/>
-          </p:cNvSpPr>
-          <p:nvPr>
-            <p:ph type="body" idx="1"/>
-          </p:nvPr>
-        </p:nvSpPr>
-        <p:spPr/>
-        <p:txBody>
-          <a:bodyPr/>
-          <a:lstStyle/>
-          <a:p>
-            <a:r>
-              <a:rPr lang="en-US" dirty="0"/>
-              <a:t>Do you have enough data?</a:t>
-            </a:r>
-          </a:p>
-          <a:p>
-            <a:endParaRPr lang="en-US" dirty="0"/>
-          </a:p>
-          <a:p>
-            <a:r>
-              <a:rPr lang="en-US" dirty="0"/>
-              <a:t>Do you need to get additional data?</a:t>
-            </a:r>
-          </a:p>
-          <a:p>
-            <a:endParaRPr lang="en-US" dirty="0"/>
-          </a:p>
-          <a:p>
-            <a:r>
-              <a:rPr lang="en-US" dirty="0"/>
-              <a:t>Which parts of the data should you prioritize looking at and understanding?</a:t>
-            </a:r>
-          </a:p>
-          <a:p>
-            <a:endParaRPr lang="en-US" dirty="0"/>
-          </a:p>
-          <a:p>
-            <a:r>
-              <a:rPr lang="en-US" dirty="0"/>
-              <a:t>What do you need to do now that will be harder to do later?</a:t>
-            </a:r>
-          </a:p>
-        </p:txBody>
-      </p:sp>
-    </p:spTree>
-    <p:extLst>
-      <p:ext uri="{BB962C8B-B14F-4D97-AF65-F5344CB8AC3E}">
-        <p14:creationId xmlns:p14="http://schemas.microsoft.com/office/powerpoint/2010/main" val="1857705847"/>
-      </p:ext>
-    </p:extLst>
-  </p:cSld>
-  <p:clrMapOvr>
-    <a:masterClrMapping/>
-  </p:clrMapOvr>
-</p:sld>
-</file>
-
-<file path=ppt/slides/slide31.xml><?xml version="1.0" encoding="utf-8"?>
-<p:sld xmlns:a="http://schemas.openxmlformats.org/drawingml/2006/main" xmlns:r="http://schemas.openxmlformats.org/officeDocument/2006/relationships" xmlns:p="http://schemas.openxmlformats.org/presentationml/2006/main">
-  <p:cSld>
-    <p:spTree>
-      <p:nvGrpSpPr>
-        <p:cNvPr id="1" name=""/>
-        <p:cNvGrpSpPr/>
-        <p:nvPr/>
-      </p:nvGrpSpPr>
-      <p:grpSpPr>
-        <a:xfrm>
-          <a:off x="0" y="0"/>
-          <a:ext cx="0" cy="0"/>
-          <a:chOff x="0" y="0"/>
-          <a:chExt cx="0" cy="0"/>
-        </a:xfrm>
-      </p:grpSpPr>
-      <p:sp>
-        <p:nvSpPr>
-          <p:cNvPr id="3" name="Title 2">
-            <a:extLst>
-              <a:ext uri="{FF2B5EF4-FFF2-40B4-BE49-F238E27FC236}">
-                <a16:creationId xmlns:a16="http://schemas.microsoft.com/office/drawing/2014/main" id="{9323871C-7CA8-1448-8FFC-1AE6E1838941}"/>
-              </a:ext>
-            </a:extLst>
-          </p:cNvPr>
-          <p:cNvSpPr>
-            <a:spLocks noGrp="1"/>
-          </p:cNvSpPr>
-          <p:nvPr>
-            <p:ph type="title"/>
-          </p:nvPr>
-        </p:nvSpPr>
-        <p:spPr/>
-        <p:txBody>
-          <a:bodyPr/>
-          <a:lstStyle/>
-          <a:p>
-            <a:r>
-              <a:rPr lang="en-US" dirty="0"/>
-              <a:t>Things to remember</a:t>
-            </a:r>
-          </a:p>
-        </p:txBody>
-      </p:sp>
-      <p:sp>
-        <p:nvSpPr>
-          <p:cNvPr id="4" name="Text Placeholder 3">
-            <a:extLst>
-              <a:ext uri="{FF2B5EF4-FFF2-40B4-BE49-F238E27FC236}">
-                <a16:creationId xmlns:a16="http://schemas.microsoft.com/office/drawing/2014/main" id="{5E600BA7-FA45-884F-9820-9E5F2CB7AA48}"/>
-              </a:ext>
-            </a:extLst>
-          </p:cNvPr>
-          <p:cNvSpPr>
-            <a:spLocks noGrp="1"/>
-          </p:cNvSpPr>
-          <p:nvPr>
-            <p:ph type="body" idx="1"/>
-          </p:nvPr>
-        </p:nvSpPr>
-        <p:spPr/>
-        <p:txBody>
-          <a:bodyPr/>
-          <a:lstStyle/>
-          <a:p>
-            <a:r>
-              <a:rPr lang="en-US" b="1" dirty="0"/>
-              <a:t>Make sure and check that you can access your project data today</a:t>
-            </a:r>
-            <a:br>
-              <a:rPr lang="en-US" b="1" dirty="0"/>
-            </a:br>
-            <a:endParaRPr lang="en-US" b="1" dirty="0"/>
-          </a:p>
-          <a:p>
-            <a:r>
-              <a:rPr lang="en-US" dirty="0"/>
-              <a:t>What’s coming next week:</a:t>
-            </a:r>
-          </a:p>
-          <a:p>
-            <a:pPr lvl="1">
-              <a:spcBef>
-                <a:spcPts val="1000"/>
-              </a:spcBef>
-            </a:pPr>
-            <a:r>
-              <a:rPr lang="en-US" dirty="0"/>
-              <a:t>Tomorrow: quick assignment to check database connection</a:t>
-            </a:r>
-          </a:p>
-          <a:p>
-            <a:pPr lvl="1">
-              <a:spcBef>
-                <a:spcPts val="1000"/>
-              </a:spcBef>
-            </a:pPr>
-            <a:r>
-              <a:rPr lang="en-US" dirty="0"/>
-              <a:t>Tuesday: weekly feedback form</a:t>
-            </a:r>
-          </a:p>
-          <a:p>
-            <a:pPr lvl="1">
-              <a:spcBef>
-                <a:spcPts val="1000"/>
-              </a:spcBef>
-            </a:pPr>
-            <a:r>
-              <a:rPr lang="en-US" dirty="0"/>
-              <a:t>Tuesday: Data Exploration + Teamwork</a:t>
-            </a:r>
-          </a:p>
-          <a:p>
-            <a:endParaRPr lang="en-US" dirty="0"/>
-          </a:p>
-          <a:p>
-            <a:r>
-              <a:rPr lang="en-US" dirty="0"/>
-              <a:t>Make sure to read </a:t>
-            </a:r>
-            <a:r>
-              <a:rPr lang="en-US" b="1" dirty="0">
-                <a:solidFill>
-                  <a:srgbClr val="C00000"/>
-                </a:solidFill>
-              </a:rPr>
-              <a:t>project proposal </a:t>
-            </a:r>
-            <a:r>
-              <a:rPr lang="en-US" dirty="0"/>
-              <a:t>preparation guidelines</a:t>
-            </a:r>
-          </a:p>
-        </p:txBody>
-      </p:sp>
-    </p:spTree>
-    <p:extLst>
-      <p:ext uri="{BB962C8B-B14F-4D97-AF65-F5344CB8AC3E}">
-        <p14:creationId xmlns:p14="http://schemas.microsoft.com/office/powerpoint/2010/main" val="2953224412"/>
       </p:ext>
     </p:extLst>
   </p:cSld>

--- a/Lectures/04-data.pptx
+++ b/Lectures/04-data.pptx
@@ -5,28 +5,26 @@
     <p:sldMasterId id="2147483648" r:id="rId1"/>
   </p:sldMasterIdLst>
   <p:notesMasterIdLst>
-    <p:notesMasterId r:id="rId21"/>
+    <p:notesMasterId r:id="rId19"/>
   </p:notesMasterIdLst>
   <p:sldIdLst>
     <p:sldId id="256" r:id="rId2"/>
     <p:sldId id="281" r:id="rId3"/>
     <p:sldId id="295" r:id="rId4"/>
     <p:sldId id="309" r:id="rId5"/>
-    <p:sldId id="310" r:id="rId6"/>
-    <p:sldId id="292" r:id="rId7"/>
-    <p:sldId id="311" r:id="rId8"/>
-    <p:sldId id="294" r:id="rId9"/>
-    <p:sldId id="282" r:id="rId10"/>
-    <p:sldId id="306" r:id="rId11"/>
-    <p:sldId id="305" r:id="rId12"/>
-    <p:sldId id="307" r:id="rId13"/>
-    <p:sldId id="308" r:id="rId14"/>
-    <p:sldId id="285" r:id="rId15"/>
-    <p:sldId id="323" r:id="rId16"/>
-    <p:sldId id="304" r:id="rId17"/>
-    <p:sldId id="283" r:id="rId18"/>
-    <p:sldId id="324" r:id="rId19"/>
-    <p:sldId id="303" r:id="rId20"/>
+    <p:sldId id="292" r:id="rId6"/>
+    <p:sldId id="311" r:id="rId7"/>
+    <p:sldId id="282" r:id="rId8"/>
+    <p:sldId id="306" r:id="rId9"/>
+    <p:sldId id="305" r:id="rId10"/>
+    <p:sldId id="307" r:id="rId11"/>
+    <p:sldId id="308" r:id="rId12"/>
+    <p:sldId id="285" r:id="rId13"/>
+    <p:sldId id="323" r:id="rId14"/>
+    <p:sldId id="304" r:id="rId15"/>
+    <p:sldId id="283" r:id="rId16"/>
+    <p:sldId id="324" r:id="rId17"/>
+    <p:sldId id="303" r:id="rId18"/>
   </p:sldIdLst>
   <p:sldSz cx="12192000" cy="6858000"/>
   <p:notesSz cx="6858000" cy="9144000"/>
@@ -264,7 +262,7 @@
       <p15:sldGuideLst xmlns:p15="http://schemas.microsoft.com/office/powerpoint/2012/main"/>
     </p:ext>
     <p:ext uri="http://customooxmlschemas.google.com/">
-      <go:slidesCustomData xmlns:go="http://customooxmlschemas.google.com/" xmlns:p15="http://schemas.microsoft.com/office/powerpoint/2012/main" xmlns:p14="http://schemas.microsoft.com/office/powerpoint/2010/main" xmlns:com="http://schemas.openxmlformats.org/drawingml/2006/compatibility" xmlns:pvml="urn:schemas-microsoft-com:office:powerpoint" xmlns:v="urn:schemas-microsoft-com:vml" xmlns:o="urn:schemas-microsoft-com:office:office" xmlns:dgm="http://schemas.openxmlformats.org/drawingml/2006/diagram" xmlns:c="http://schemas.openxmlformats.org/drawingml/2006/chart" xmlns:mv="urn:schemas-microsoft-com:mac:vml" xmlns:mc="http://schemas.openxmlformats.org/markup-compatibility/2006" xmlns="" r:id="rId34" roundtripDataSignature="AMtx7mjFyVUGRZWio+dc9dxzYsimUxNJbg=="/>
+      <go:slidesCustomData xmlns="" xmlns:mc="http://schemas.openxmlformats.org/markup-compatibility/2006" xmlns:mv="urn:schemas-microsoft-com:mac:vml" xmlns:c="http://schemas.openxmlformats.org/drawingml/2006/chart" xmlns:dgm="http://schemas.openxmlformats.org/drawingml/2006/diagram" xmlns:o="urn:schemas-microsoft-com:office:office" xmlns:v="urn:schemas-microsoft-com:vml" xmlns:pvml="urn:schemas-microsoft-com:office:powerpoint" xmlns:com="http://schemas.openxmlformats.org/drawingml/2006/compatibility" xmlns:p14="http://schemas.microsoft.com/office/powerpoint/2010/main" xmlns:p15="http://schemas.microsoft.com/office/powerpoint/2012/main" xmlns:go="http://customooxmlschemas.google.com/" r:id="rId34" roundtripDataSignature="AMtx7mjFyVUGRZWio+dc9dxzYsimUxNJbg=="/>
     </p:ext>
   </p:extLst>
 </p:presentation>
@@ -6753,302 +6751,6 @@
   <p:cSld>
     <p:spTree>
       <p:nvGrpSpPr>
-        <p:cNvPr id="1" name="Shape 506"/>
-        <p:cNvGrpSpPr/>
-        <p:nvPr/>
-      </p:nvGrpSpPr>
-      <p:grpSpPr>
-        <a:xfrm>
-          <a:off x="0" y="0"/>
-          <a:ext cx="0" cy="0"/>
-          <a:chOff x="0" y="0"/>
-          <a:chExt cx="0" cy="0"/>
-        </a:xfrm>
-      </p:grpSpPr>
-      <p:sp>
-        <p:nvSpPr>
-          <p:cNvPr id="507" name="Google Shape;507;g32cbaf05b3f_0_56:notes"/>
-          <p:cNvSpPr>
-            <a:spLocks noGrp="1" noRot="1" noChangeAspect="1"/>
-          </p:cNvSpPr>
-          <p:nvPr>
-            <p:ph type="sldImg" idx="2"/>
-          </p:nvPr>
-        </p:nvSpPr>
-        <p:spPr>
-          <a:xfrm>
-            <a:off x="381000" y="685800"/>
-            <a:ext cx="6096000" cy="3429000"/>
-          </a:xfrm>
-          <a:custGeom>
-            <a:avLst/>
-            <a:gdLst/>
-            <a:ahLst/>
-            <a:cxnLst/>
-            <a:rect l="l" t="t" r="r" b="b"/>
-            <a:pathLst>
-              <a:path w="120000" h="120000" extrusionOk="0">
-                <a:moveTo>
-                  <a:pt x="0" y="0"/>
-                </a:moveTo>
-                <a:lnTo>
-                  <a:pt x="120000" y="0"/>
-                </a:lnTo>
-                <a:lnTo>
-                  <a:pt x="120000" y="120000"/>
-                </a:lnTo>
-                <a:lnTo>
-                  <a:pt x="0" y="120000"/>
-                </a:lnTo>
-                <a:close/>
-              </a:path>
-            </a:pathLst>
-          </a:custGeom>
-          <a:noFill/>
-          <a:ln w="12700" cap="flat" cmpd="sng">
-            <a:solidFill>
-              <a:srgbClr val="000000"/>
-            </a:solidFill>
-            <a:prstDash val="solid"/>
-            <a:round/>
-            <a:headEnd type="none" w="sm" len="sm"/>
-            <a:tailEnd type="none" w="sm" len="sm"/>
-          </a:ln>
-        </p:spPr>
-      </p:sp>
-      <p:sp>
-        <p:nvSpPr>
-          <p:cNvPr id="508" name="Google Shape;508;g32cbaf05b3f_0_56:notes"/>
-          <p:cNvSpPr txBox="1">
-            <a:spLocks noGrp="1"/>
-          </p:cNvSpPr>
-          <p:nvPr>
-            <p:ph type="body" idx="1"/>
-          </p:nvPr>
-        </p:nvSpPr>
-        <p:spPr>
-          <a:xfrm>
-            <a:off x="685800" y="4343400"/>
-            <a:ext cx="5486400" cy="4114800"/>
-          </a:xfrm>
-          <a:prstGeom prst="rect">
-            <a:avLst/>
-          </a:prstGeom>
-          <a:noFill/>
-          <a:ln>
-            <a:noFill/>
-          </a:ln>
-        </p:spPr>
-        <p:txBody>
-          <a:bodyPr spcFirstLastPara="1" wrap="square" lIns="91425" tIns="45700" rIns="91425" bIns="45700" anchor="t" anchorCtr="0">
-            <a:noAutofit/>
-          </a:bodyPr>
-          <a:lstStyle/>
-          <a:p>
-            <a:pPr marL="0" lvl="0" indent="0" algn="l" rtl="0">
-              <a:lnSpc>
-                <a:spcPct val="100000"/>
-              </a:lnSpc>
-              <a:spcBef>
-                <a:spcPts val="360"/>
-              </a:spcBef>
-              <a:spcAft>
-                <a:spcPts val="0"/>
-              </a:spcAft>
-              <a:buSzPts val="1400"/>
-              <a:buNone/>
-            </a:pPr>
-            <a:r>
-              <a:rPr lang="en-US"/>
-              <a:t>Types of data:</a:t>
-            </a:r>
-            <a:endParaRPr/>
-          </a:p>
-          <a:p>
-            <a:pPr marL="457200" lvl="0" indent="-317500" algn="l" rtl="0">
-              <a:lnSpc>
-                <a:spcPct val="100000"/>
-              </a:lnSpc>
-              <a:spcBef>
-                <a:spcPts val="360"/>
-              </a:spcBef>
-              <a:spcAft>
-                <a:spcPts val="0"/>
-              </a:spcAft>
-              <a:buSzPts val="1400"/>
-              <a:buChar char="●"/>
-            </a:pPr>
-            <a:r>
-              <a:rPr lang="en-US"/>
-              <a:t>Program Level</a:t>
-            </a:r>
-            <a:endParaRPr/>
-          </a:p>
-          <a:p>
-            <a:pPr marL="457200" lvl="0" indent="-317500" algn="l" rtl="0">
-              <a:lnSpc>
-                <a:spcPct val="100000"/>
-              </a:lnSpc>
-              <a:spcBef>
-                <a:spcPts val="0"/>
-              </a:spcBef>
-              <a:spcAft>
-                <a:spcPts val="0"/>
-              </a:spcAft>
-              <a:buSzPts val="1400"/>
-              <a:buChar char="●"/>
-            </a:pPr>
-            <a:r>
-              <a:rPr lang="en-US"/>
-              <a:t>Transactional</a:t>
-            </a:r>
-            <a:endParaRPr/>
-          </a:p>
-          <a:p>
-            <a:pPr marL="457200" lvl="0" indent="-317500" algn="l" rtl="0">
-              <a:lnSpc>
-                <a:spcPct val="100000"/>
-              </a:lnSpc>
-              <a:spcBef>
-                <a:spcPts val="0"/>
-              </a:spcBef>
-              <a:spcAft>
-                <a:spcPts val="0"/>
-              </a:spcAft>
-              <a:buSzPts val="1400"/>
-              <a:buChar char="●"/>
-            </a:pPr>
-            <a:r>
-              <a:rPr lang="en-US"/>
-              <a:t>Spatial</a:t>
-            </a:r>
-            <a:endParaRPr/>
-          </a:p>
-          <a:p>
-            <a:pPr marL="457200" lvl="0" indent="-317500" algn="l" rtl="0">
-              <a:lnSpc>
-                <a:spcPct val="100000"/>
-              </a:lnSpc>
-              <a:spcBef>
-                <a:spcPts val="0"/>
-              </a:spcBef>
-              <a:spcAft>
-                <a:spcPts val="0"/>
-              </a:spcAft>
-              <a:buSzPts val="1400"/>
-              <a:buChar char="●"/>
-            </a:pPr>
-            <a:r>
-              <a:rPr lang="en-US"/>
-              <a:t>Text</a:t>
-            </a:r>
-            <a:endParaRPr/>
-          </a:p>
-          <a:p>
-            <a:pPr marL="457200" lvl="0" indent="-317500" algn="l" rtl="0">
-              <a:lnSpc>
-                <a:spcPct val="100000"/>
-              </a:lnSpc>
-              <a:spcBef>
-                <a:spcPts val="0"/>
-              </a:spcBef>
-              <a:spcAft>
-                <a:spcPts val="0"/>
-              </a:spcAft>
-              <a:buSzPts val="1400"/>
-              <a:buChar char="●"/>
-            </a:pPr>
-            <a:r>
-              <a:rPr lang="en-US"/>
-              <a:t>Images/Audio/Video</a:t>
-            </a:r>
-            <a:endParaRPr/>
-          </a:p>
-          <a:p>
-            <a:pPr marL="0" lvl="0" indent="0" algn="l" rtl="0">
-              <a:lnSpc>
-                <a:spcPct val="100000"/>
-              </a:lnSpc>
-              <a:spcBef>
-                <a:spcPts val="360"/>
-              </a:spcBef>
-              <a:spcAft>
-                <a:spcPts val="0"/>
-              </a:spcAft>
-              <a:buSzPts val="1400"/>
-              <a:buNone/>
-            </a:pPr>
-            <a:endParaRPr/>
-          </a:p>
-        </p:txBody>
-      </p:sp>
-      <p:sp>
-        <p:nvSpPr>
-          <p:cNvPr id="509" name="Google Shape;509;g32cbaf05b3f_0_56:notes"/>
-          <p:cNvSpPr txBox="1">
-            <a:spLocks noGrp="1"/>
-          </p:cNvSpPr>
-          <p:nvPr>
-            <p:ph type="sldNum" idx="12"/>
-          </p:nvPr>
-        </p:nvSpPr>
-        <p:spPr>
-          <a:xfrm>
-            <a:off x="3884613" y="8685213"/>
-            <a:ext cx="2971800" cy="457200"/>
-          </a:xfrm>
-          <a:prstGeom prst="rect">
-            <a:avLst/>
-          </a:prstGeom>
-          <a:noFill/>
-          <a:ln>
-            <a:noFill/>
-          </a:ln>
-        </p:spPr>
-        <p:txBody>
-          <a:bodyPr spcFirstLastPara="1" wrap="square" lIns="91425" tIns="45700" rIns="91425" bIns="45700" anchor="b" anchorCtr="0">
-            <a:noAutofit/>
-          </a:bodyPr>
-          <a:lstStyle/>
-          <a:p>
-            <a:pPr marL="0" lvl="0" indent="0" algn="r" rtl="0">
-              <a:lnSpc>
-                <a:spcPct val="100000"/>
-              </a:lnSpc>
-              <a:spcBef>
-                <a:spcPts val="0"/>
-              </a:spcBef>
-              <a:spcAft>
-                <a:spcPts val="0"/>
-              </a:spcAft>
-              <a:buClr>
-                <a:srgbClr val="000000"/>
-              </a:buClr>
-              <a:buSzPts val="1200"/>
-              <a:buFont typeface="Arial"/>
-              <a:buNone/>
-            </a:pPr>
-            <a:fld id="{00000000-1234-1234-1234-123412341234}" type="slidenum">
-              <a:rPr lang="en-US"/>
-              <a:t>5</a:t>
-            </a:fld>
-            <a:endParaRPr/>
-          </a:p>
-        </p:txBody>
-      </p:sp>
-    </p:spTree>
-  </p:cSld>
-  <p:clrMapOvr>
-    <a:masterClrMapping/>
-  </p:clrMapOvr>
-</p:notes>
-</file>
-
-<file path=ppt/notesSlides/notesSlide4.xml><?xml version="1.0" encoding="utf-8"?>
-<p:notes xmlns:a="http://schemas.openxmlformats.org/drawingml/2006/main" xmlns:r="http://schemas.openxmlformats.org/officeDocument/2006/relationships" xmlns:p="http://schemas.openxmlformats.org/presentationml/2006/main" showMasterSp="0" showMasterPhAnim="0">
-  <p:cSld>
-    <p:spTree>
-      <p:nvGrpSpPr>
         <p:cNvPr id="1" name="Shape 520"/>
         <p:cNvGrpSpPr/>
         <p:nvPr/>
@@ -7206,7 +6908,7 @@
             </a:pPr>
             <a:fld id="{00000000-1234-1234-1234-123412341234}" type="slidenum">
               <a:rPr lang="en-US"/>
-              <a:t>6</a:t>
+              <a:t>5</a:t>
             </a:fld>
             <a:endParaRPr/>
           </a:p>
@@ -7220,7 +6922,7 @@
 </p:notes>
 </file>
 
-<file path=ppt/notesSlides/notesSlide5.xml><?xml version="1.0" encoding="utf-8"?>
+<file path=ppt/notesSlides/notesSlide4.xml><?xml version="1.0" encoding="utf-8"?>
 <p:notes xmlns:a="http://schemas.openxmlformats.org/drawingml/2006/main" xmlns:r="http://schemas.openxmlformats.org/officeDocument/2006/relationships" xmlns:p="http://schemas.openxmlformats.org/presentationml/2006/main" showMasterSp="0" showMasterPhAnim="0">
   <p:cSld>
     <p:spTree>
@@ -7406,7 +7108,7 @@
             </a:pPr>
             <a:fld id="{00000000-1234-1234-1234-123412341234}" type="slidenum">
               <a:rPr lang="en-US"/>
-              <a:t>7</a:t>
+              <a:t>6</a:t>
             </a:fld>
             <a:endParaRPr/>
           </a:p>
@@ -7420,183 +7122,7 @@
 </p:notes>
 </file>
 
-<file path=ppt/notesSlides/notesSlide6.xml><?xml version="1.0" encoding="utf-8"?>
-<p:notes xmlns:a="http://schemas.openxmlformats.org/drawingml/2006/main" xmlns:r="http://schemas.openxmlformats.org/officeDocument/2006/relationships" xmlns:p="http://schemas.openxmlformats.org/presentationml/2006/main" showMasterSp="0" showMasterPhAnim="0">
-  <p:cSld>
-    <p:spTree>
-      <p:nvGrpSpPr>
-        <p:cNvPr id="1" name="Shape 537"/>
-        <p:cNvGrpSpPr/>
-        <p:nvPr/>
-      </p:nvGrpSpPr>
-      <p:grpSpPr>
-        <a:xfrm>
-          <a:off x="0" y="0"/>
-          <a:ext cx="0" cy="0"/>
-          <a:chOff x="0" y="0"/>
-          <a:chExt cx="0" cy="0"/>
-        </a:xfrm>
-      </p:grpSpPr>
-      <p:sp>
-        <p:nvSpPr>
-          <p:cNvPr id="538" name="Google Shape;538;g32d3355825c_1_12:notes"/>
-          <p:cNvSpPr>
-            <a:spLocks noGrp="1" noRot="1" noChangeAspect="1"/>
-          </p:cNvSpPr>
-          <p:nvPr>
-            <p:ph type="sldImg" idx="2"/>
-          </p:nvPr>
-        </p:nvSpPr>
-        <p:spPr>
-          <a:xfrm>
-            <a:off x="381000" y="685800"/>
-            <a:ext cx="6096000" cy="3429000"/>
-          </a:xfrm>
-          <a:custGeom>
-            <a:avLst/>
-            <a:gdLst/>
-            <a:ahLst/>
-            <a:cxnLst/>
-            <a:rect l="l" t="t" r="r" b="b"/>
-            <a:pathLst>
-              <a:path w="120000" h="120000" extrusionOk="0">
-                <a:moveTo>
-                  <a:pt x="0" y="0"/>
-                </a:moveTo>
-                <a:lnTo>
-                  <a:pt x="120000" y="0"/>
-                </a:lnTo>
-                <a:lnTo>
-                  <a:pt x="120000" y="120000"/>
-                </a:lnTo>
-                <a:lnTo>
-                  <a:pt x="0" y="120000"/>
-                </a:lnTo>
-                <a:close/>
-              </a:path>
-            </a:pathLst>
-          </a:custGeom>
-          <a:noFill/>
-          <a:ln w="12700" cap="flat" cmpd="sng">
-            <a:solidFill>
-              <a:srgbClr val="000000"/>
-            </a:solidFill>
-            <a:prstDash val="solid"/>
-            <a:round/>
-            <a:headEnd type="none" w="sm" len="sm"/>
-            <a:tailEnd type="none" w="sm" len="sm"/>
-          </a:ln>
-        </p:spPr>
-      </p:sp>
-      <p:sp>
-        <p:nvSpPr>
-          <p:cNvPr id="539" name="Google Shape;539;g32d3355825c_1_12:notes"/>
-          <p:cNvSpPr txBox="1">
-            <a:spLocks noGrp="1"/>
-          </p:cNvSpPr>
-          <p:nvPr>
-            <p:ph type="body" idx="1"/>
-          </p:nvPr>
-        </p:nvSpPr>
-        <p:spPr>
-          <a:xfrm>
-            <a:off x="685800" y="4343400"/>
-            <a:ext cx="5486400" cy="4114800"/>
-          </a:xfrm>
-          <a:prstGeom prst="rect">
-            <a:avLst/>
-          </a:prstGeom>
-          <a:noFill/>
-          <a:ln>
-            <a:noFill/>
-          </a:ln>
-        </p:spPr>
-        <p:txBody>
-          <a:bodyPr spcFirstLastPara="1" wrap="square" lIns="91425" tIns="45700" rIns="91425" bIns="45700" anchor="t" anchorCtr="0">
-            <a:noAutofit/>
-          </a:bodyPr>
-          <a:lstStyle/>
-          <a:p>
-            <a:pPr marL="0" lvl="0" indent="0" algn="l" rtl="0">
-              <a:lnSpc>
-                <a:spcPct val="100000"/>
-              </a:lnSpc>
-              <a:spcBef>
-                <a:spcPts val="360"/>
-              </a:spcBef>
-              <a:spcAft>
-                <a:spcPts val="0"/>
-              </a:spcAft>
-              <a:buSzPts val="1400"/>
-              <a:buNone/>
-            </a:pPr>
-            <a:endParaRPr/>
-          </a:p>
-        </p:txBody>
-      </p:sp>
-      <p:sp>
-        <p:nvSpPr>
-          <p:cNvPr id="540" name="Google Shape;540;g32d3355825c_1_12:notes"/>
-          <p:cNvSpPr txBox="1">
-            <a:spLocks noGrp="1"/>
-          </p:cNvSpPr>
-          <p:nvPr>
-            <p:ph type="sldNum" idx="12"/>
-          </p:nvPr>
-        </p:nvSpPr>
-        <p:spPr>
-          <a:xfrm>
-            <a:off x="3884613" y="8685213"/>
-            <a:ext cx="2971800" cy="457200"/>
-          </a:xfrm>
-          <a:prstGeom prst="rect">
-            <a:avLst/>
-          </a:prstGeom>
-          <a:noFill/>
-          <a:ln>
-            <a:noFill/>
-          </a:ln>
-        </p:spPr>
-        <p:txBody>
-          <a:bodyPr spcFirstLastPara="1" wrap="square" lIns="91425" tIns="45700" rIns="91425" bIns="45700" anchor="b" anchorCtr="0">
-            <a:noAutofit/>
-          </a:bodyPr>
-          <a:lstStyle/>
-          <a:p>
-            <a:pPr marL="0" lvl="0" indent="0" algn="r" rtl="0">
-              <a:lnSpc>
-                <a:spcPct val="100000"/>
-              </a:lnSpc>
-              <a:spcBef>
-                <a:spcPts val="0"/>
-              </a:spcBef>
-              <a:spcAft>
-                <a:spcPts val="0"/>
-              </a:spcAft>
-              <a:buClr>
-                <a:srgbClr val="000000"/>
-              </a:buClr>
-              <a:buSzPts val="1200"/>
-              <a:buFont typeface="Arial"/>
-              <a:buNone/>
-            </a:pPr>
-            <a:fld id="{00000000-1234-1234-1234-123412341234}" type="slidenum">
-              <a:rPr lang="en-US"/>
-              <a:t>8</a:t>
-            </a:fld>
-            <a:endParaRPr/>
-          </a:p>
-        </p:txBody>
-      </p:sp>
-    </p:spTree>
-  </p:cSld>
-  <p:clrMapOvr>
-    <a:masterClrMapping/>
-  </p:clrMapOvr>
-</p:notes>
-</file>
-
-<file path=ppt/notesSlides/notesSlide7.xml><?xml version="1.0" encoding="utf-8"?>
+<file path=ppt/notesSlides/notesSlide5.xml><?xml version="1.0" encoding="utf-8"?>
 <p:notes xmlns:a="http://schemas.openxmlformats.org/drawingml/2006/main" xmlns:r="http://schemas.openxmlformats.org/officeDocument/2006/relationships" xmlns:p="http://schemas.openxmlformats.org/presentationml/2006/main">
   <p:cSld>
     <p:spTree>
@@ -7690,7 +7216,7 @@
                 <a:cs typeface="Calibri"/>
                 <a:sym typeface="Calibri"/>
               </a:rPr>
-              <a:t>11</a:t>
+              <a:t>9</a:t>
             </a:fld>
             <a:endParaRPr lang="en-US" sz="1200" b="0" i="0" u="none" strike="noStrike" cap="none">
               <a:solidFill>
@@ -7717,7 +7243,7 @@
 </p:notes>
 </file>
 
-<file path=ppt/notesSlides/notesSlide8.xml><?xml version="1.0" encoding="utf-8"?>
+<file path=ppt/notesSlides/notesSlide6.xml><?xml version="1.0" encoding="utf-8"?>
 <p:notes xmlns:a="http://schemas.openxmlformats.org/drawingml/2006/main" xmlns:r="http://schemas.openxmlformats.org/officeDocument/2006/relationships" xmlns:p="http://schemas.openxmlformats.org/presentationml/2006/main">
   <p:cSld>
     <p:spTree>
@@ -7810,7 +7336,7 @@
                 <a:cs typeface="Calibri"/>
                 <a:sym typeface="Calibri"/>
               </a:rPr>
-              <a:t>14</a:t>
+              <a:t>12</a:t>
             </a:fld>
             <a:endParaRPr lang="en-US" sz="1200" b="0" i="0" u="none" strike="noStrike" cap="none">
               <a:solidFill>
@@ -7837,7 +7363,7 @@
 </p:notes>
 </file>
 
-<file path=ppt/notesSlides/notesSlide9.xml><?xml version="1.0" encoding="utf-8"?>
+<file path=ppt/notesSlides/notesSlide7.xml><?xml version="1.0" encoding="utf-8"?>
 <p:notes xmlns:a="http://schemas.openxmlformats.org/drawingml/2006/main" xmlns:r="http://schemas.openxmlformats.org/officeDocument/2006/relationships" xmlns:p="http://schemas.openxmlformats.org/presentationml/2006/main" showMasterSp="0" showMasterPhAnim="0">
   <p:cSld>
     <p:spTree>
@@ -7999,7 +7525,7 @@
             </a:pPr>
             <a:fld id="{00000000-1234-1234-1234-123412341234}" type="slidenum">
               <a:rPr lang="en-US"/>
-              <a:t>15</a:t>
+              <a:t>13</a:t>
             </a:fld>
             <a:endParaRPr/>
           </a:p>
@@ -13756,193 +13282,6 @@
           <p:cNvPr id="2" name="Title 1">
             <a:extLst>
               <a:ext uri="{FF2B5EF4-FFF2-40B4-BE49-F238E27FC236}">
-                <a16:creationId xmlns:a16="http://schemas.microsoft.com/office/drawing/2014/main" id="{CE46E641-F79B-6F49-B8EF-A4D6E70FF61F}"/>
-              </a:ext>
-            </a:extLst>
-          </p:cNvPr>
-          <p:cNvSpPr>
-            <a:spLocks noGrp="1"/>
-          </p:cNvSpPr>
-          <p:nvPr>
-            <p:ph type="title"/>
-          </p:nvPr>
-        </p:nvSpPr>
-        <p:spPr/>
-        <p:txBody>
-          <a:bodyPr/>
-          <a:lstStyle/>
-          <a:p>
-            <a:r>
-              <a:rPr lang="en-US" dirty="0"/>
-              <a:t>Scenarios</a:t>
-            </a:r>
-          </a:p>
-        </p:txBody>
-      </p:sp>
-      <p:sp>
-        <p:nvSpPr>
-          <p:cNvPr id="3" name="Text Placeholder 2">
-            <a:extLst>
-              <a:ext uri="{FF2B5EF4-FFF2-40B4-BE49-F238E27FC236}">
-                <a16:creationId xmlns:a16="http://schemas.microsoft.com/office/drawing/2014/main" id="{109530BD-D523-581E-F9C9-8075A2275413}"/>
-              </a:ext>
-            </a:extLst>
-          </p:cNvPr>
-          <p:cNvSpPr>
-            <a:spLocks noGrp="1"/>
-          </p:cNvSpPr>
-          <p:nvPr>
-            <p:ph type="body" idx="1"/>
-          </p:nvPr>
-        </p:nvSpPr>
-        <p:spPr/>
-        <p:txBody>
-          <a:bodyPr/>
-          <a:lstStyle/>
-          <a:p>
-            <a:r>
-              <a:rPr lang="en-US" dirty="0"/>
-              <a:t>Internal to an organization</a:t>
-            </a:r>
-          </a:p>
-          <a:p>
-            <a:r>
-              <a:rPr lang="en-US" dirty="0"/>
-              <a:t>Partnering with external organization – researcher, consultant, etc.</a:t>
-            </a:r>
-          </a:p>
-        </p:txBody>
-      </p:sp>
-    </p:spTree>
-    <p:extLst>
-      <p:ext uri="{BB962C8B-B14F-4D97-AF65-F5344CB8AC3E}">
-        <p14:creationId xmlns:p14="http://schemas.microsoft.com/office/powerpoint/2010/main" val="3974381565"/>
-      </p:ext>
-    </p:extLst>
-  </p:cSld>
-  <p:clrMapOvr>
-    <a:masterClrMapping/>
-  </p:clrMapOvr>
-</p:sld>
-</file>
-
-<file path=ppt/slides/slide11.xml><?xml version="1.0" encoding="utf-8"?>
-<p:sld xmlns:a="http://schemas.openxmlformats.org/drawingml/2006/main" xmlns:r="http://schemas.openxmlformats.org/officeDocument/2006/relationships" xmlns:p="http://schemas.openxmlformats.org/presentationml/2006/main">
-  <p:cSld>
-    <p:spTree>
-      <p:nvGrpSpPr>
-        <p:cNvPr id="1" name=""/>
-        <p:cNvGrpSpPr/>
-        <p:nvPr/>
-      </p:nvGrpSpPr>
-      <p:grpSpPr>
-        <a:xfrm>
-          <a:off x="0" y="0"/>
-          <a:ext cx="0" cy="0"/>
-          <a:chOff x="0" y="0"/>
-          <a:chExt cx="0" cy="0"/>
-        </a:xfrm>
-      </p:grpSpPr>
-      <p:sp>
-        <p:nvSpPr>
-          <p:cNvPr id="2" name="Title 1">
-            <a:extLst>
-              <a:ext uri="{FF2B5EF4-FFF2-40B4-BE49-F238E27FC236}">
-                <a16:creationId xmlns:a16="http://schemas.microsoft.com/office/drawing/2014/main" id="{979BFBA3-9597-C18F-DC54-EA1CD2F2D248}"/>
-              </a:ext>
-            </a:extLst>
-          </p:cNvPr>
-          <p:cNvSpPr>
-            <a:spLocks noGrp="1"/>
-          </p:cNvSpPr>
-          <p:nvPr>
-            <p:ph type="title"/>
-          </p:nvPr>
-        </p:nvSpPr>
-        <p:spPr/>
-        <p:txBody>
-          <a:bodyPr/>
-          <a:lstStyle/>
-          <a:p>
-            <a:r>
-              <a:rPr lang="en-US" dirty="0"/>
-              <a:t>Political Challenges</a:t>
-            </a:r>
-          </a:p>
-        </p:txBody>
-      </p:sp>
-      <p:sp>
-        <p:nvSpPr>
-          <p:cNvPr id="3" name="Text Placeholder 2">
-            <a:extLst>
-              <a:ext uri="{FF2B5EF4-FFF2-40B4-BE49-F238E27FC236}">
-                <a16:creationId xmlns:a16="http://schemas.microsoft.com/office/drawing/2014/main" id="{C6BF3655-4FBB-7724-83F4-8175A4967B32}"/>
-              </a:ext>
-            </a:extLst>
-          </p:cNvPr>
-          <p:cNvSpPr>
-            <a:spLocks noGrp="1"/>
-          </p:cNvSpPr>
-          <p:nvPr>
-            <p:ph type="body" idx="1"/>
-          </p:nvPr>
-        </p:nvSpPr>
-        <p:spPr/>
-        <p:txBody>
-          <a:bodyPr/>
-          <a:lstStyle/>
-          <a:p>
-            <a:r>
-              <a:rPr lang="en-US" dirty="0"/>
-              <a:t>Understanding the stakeholders and value for them</a:t>
-            </a:r>
-          </a:p>
-          <a:p>
-            <a:r>
-              <a:rPr lang="en-US" dirty="0"/>
-              <a:t>May lead to getting subsets</a:t>
-            </a:r>
-          </a:p>
-          <a:p>
-            <a:endParaRPr lang="en-US" dirty="0"/>
-          </a:p>
-        </p:txBody>
-      </p:sp>
-    </p:spTree>
-    <p:extLst>
-      <p:ext uri="{BB962C8B-B14F-4D97-AF65-F5344CB8AC3E}">
-        <p14:creationId xmlns:p14="http://schemas.microsoft.com/office/powerpoint/2010/main" val="2201292742"/>
-      </p:ext>
-    </p:extLst>
-  </p:cSld>
-  <p:clrMapOvr>
-    <a:masterClrMapping/>
-  </p:clrMapOvr>
-</p:sld>
-</file>
-
-<file path=ppt/slides/slide12.xml><?xml version="1.0" encoding="utf-8"?>
-<p:sld xmlns:a="http://schemas.openxmlformats.org/drawingml/2006/main" xmlns:r="http://schemas.openxmlformats.org/officeDocument/2006/relationships" xmlns:p="http://schemas.openxmlformats.org/presentationml/2006/main">
-  <p:cSld>
-    <p:spTree>
-      <p:nvGrpSpPr>
-        <p:cNvPr id="1" name=""/>
-        <p:cNvGrpSpPr/>
-        <p:nvPr/>
-      </p:nvGrpSpPr>
-      <p:grpSpPr>
-        <a:xfrm>
-          <a:off x="0" y="0"/>
-          <a:ext cx="0" cy="0"/>
-          <a:chOff x="0" y="0"/>
-          <a:chExt cx="0" cy="0"/>
-        </a:xfrm>
-      </p:grpSpPr>
-      <p:sp>
-        <p:nvSpPr>
-          <p:cNvPr id="2" name="Title 1">
-            <a:extLst>
-              <a:ext uri="{FF2B5EF4-FFF2-40B4-BE49-F238E27FC236}">
                 <a16:creationId xmlns:a16="http://schemas.microsoft.com/office/drawing/2014/main" id="{5B1598E1-2970-A57B-2054-6EA7A1C0E11F}"/>
               </a:ext>
             </a:extLst>
@@ -14013,7 +13352,7 @@
 </p:sld>
 </file>
 
-<file path=ppt/slides/slide13.xml><?xml version="1.0" encoding="utf-8"?>
+<file path=ppt/slides/slide11.xml><?xml version="1.0" encoding="utf-8"?>
 <p:sld xmlns:a="http://schemas.openxmlformats.org/drawingml/2006/main" xmlns:r="http://schemas.openxmlformats.org/officeDocument/2006/relationships" xmlns:p="http://schemas.openxmlformats.org/presentationml/2006/main">
   <p:cSld>
     <p:spTree>
@@ -14420,7 +13759,7 @@
 </p:sld>
 </file>
 
-<file path=ppt/slides/slide14.xml><?xml version="1.0" encoding="utf-8"?>
+<file path=ppt/slides/slide12.xml><?xml version="1.0" encoding="utf-8"?>
 <p:sld xmlns:a="http://schemas.openxmlformats.org/drawingml/2006/main" xmlns:r="http://schemas.openxmlformats.org/officeDocument/2006/relationships" xmlns:p="http://schemas.openxmlformats.org/presentationml/2006/main">
   <p:cSld>
     <p:spTree>
@@ -14580,7 +13919,7 @@
 </p:sld>
 </file>
 
-<file path=ppt/slides/slide15.xml><?xml version="1.0" encoding="utf-8"?>
+<file path=ppt/slides/slide13.xml><?xml version="1.0" encoding="utf-8"?>
 <p:sld xmlns:a="http://schemas.openxmlformats.org/drawingml/2006/main" xmlns:r="http://schemas.openxmlformats.org/officeDocument/2006/relationships" xmlns:p="http://schemas.openxmlformats.org/presentationml/2006/main">
   <p:cSld>
     <p:spTree>
@@ -14823,7 +14162,7 @@
 </p:sld>
 </file>
 
-<file path=ppt/slides/slide16.xml><?xml version="1.0" encoding="utf-8"?>
+<file path=ppt/slides/slide14.xml><?xml version="1.0" encoding="utf-8"?>
 <p:sld xmlns:a="http://schemas.openxmlformats.org/drawingml/2006/main" xmlns:r="http://schemas.openxmlformats.org/officeDocument/2006/relationships" xmlns:p="http://schemas.openxmlformats.org/presentationml/2006/main">
   <p:cSld>
     <p:spTree>
@@ -14927,7 +14266,7 @@
 </p:sld>
 </file>
 
-<file path=ppt/slides/slide17.xml><?xml version="1.0" encoding="utf-8"?>
+<file path=ppt/slides/slide15.xml><?xml version="1.0" encoding="utf-8"?>
 <p:sld xmlns:a="http://schemas.openxmlformats.org/drawingml/2006/main" xmlns:r="http://schemas.openxmlformats.org/officeDocument/2006/relationships" xmlns:p="http://schemas.openxmlformats.org/presentationml/2006/main">
   <p:cSld>
     <p:spTree>
@@ -15037,7 +14376,7 @@
 </p:sld>
 </file>
 
-<file path=ppt/slides/slide18.xml><?xml version="1.0" encoding="utf-8"?>
+<file path=ppt/slides/slide16.xml><?xml version="1.0" encoding="utf-8"?>
 <p:sld xmlns:a="http://schemas.openxmlformats.org/drawingml/2006/main" xmlns:r="http://schemas.openxmlformats.org/officeDocument/2006/relationships" xmlns:p="http://schemas.openxmlformats.org/presentationml/2006/main">
   <p:cSld>
     <p:spTree>
@@ -15150,7 +14489,7 @@
 </p:sld>
 </file>
 
-<file path=ppt/slides/slide19.xml><?xml version="1.0" encoding="utf-8"?>
+<file path=ppt/slides/slide17.xml><?xml version="1.0" encoding="utf-8"?>
 <p:sld xmlns:a="http://schemas.openxmlformats.org/drawingml/2006/main" xmlns:r="http://schemas.openxmlformats.org/officeDocument/2006/relationships" xmlns:p="http://schemas.openxmlformats.org/presentationml/2006/main">
   <p:cSld>
     <p:spTree>
@@ -15229,17 +14568,6 @@
             <a:r>
               <a:rPr lang="en-US" dirty="0"/>
               <a:t>What’s coming next week:</a:t>
-            </a:r>
-          </a:p>
-          <a:p>
-            <a:pPr lvl="1">
-              <a:spcBef>
-                <a:spcPts val="1000"/>
-              </a:spcBef>
-            </a:pPr>
-            <a:r>
-              <a:rPr lang="en-US" dirty="0"/>
-              <a:t>Tomorrow: quick assignment to check database connection</a:t>
             </a:r>
           </a:p>
           <a:p>
@@ -15370,6 +14698,13 @@
               <a:rPr lang="en-US" b="1" dirty="0"/>
               <a:t>Make sure and check that you can access your project data today</a:t>
             </a:r>
+          </a:p>
+          <a:p>
+            <a:pPr lvl="1"/>
+            <a:r>
+              <a:rPr lang="en-US" dirty="0"/>
+              <a:t>quick assignment to check database connection (should take 1 minute)</a:t>
+            </a:r>
             <a:br>
               <a:rPr lang="en-US" b="1" dirty="0"/>
             </a:br>
@@ -15379,17 +14714,6 @@
             <a:r>
               <a:rPr lang="en-US" dirty="0"/>
               <a:t>What’s coming next week:</a:t>
-            </a:r>
-          </a:p>
-          <a:p>
-            <a:pPr lvl="1">
-              <a:spcBef>
-                <a:spcPts val="1000"/>
-              </a:spcBef>
-            </a:pPr>
-            <a:r>
-              <a:rPr lang="en-US" dirty="0"/>
-              <a:t>Tomorrow: quick assignment to check database connection (should take 1 minute)</a:t>
             </a:r>
           </a:p>
           <a:p>
@@ -15942,595 +15266,6 @@
   <p:cSld>
     <p:spTree>
       <p:nvGrpSpPr>
-        <p:cNvPr id="1" name="Shape 510"/>
-        <p:cNvGrpSpPr/>
-        <p:nvPr/>
-      </p:nvGrpSpPr>
-      <p:grpSpPr>
-        <a:xfrm>
-          <a:off x="0" y="0"/>
-          <a:ext cx="0" cy="0"/>
-          <a:chOff x="0" y="0"/>
-          <a:chExt cx="0" cy="0"/>
-        </a:xfrm>
-      </p:grpSpPr>
-      <p:sp>
-        <p:nvSpPr>
-          <p:cNvPr id="511" name="Google Shape;511;g32cbaf05b3f_0_56"/>
-          <p:cNvSpPr/>
-          <p:nvPr/>
-        </p:nvSpPr>
-        <p:spPr>
-          <a:xfrm>
-            <a:off x="6950000" y="1656800"/>
-            <a:ext cx="4826400" cy="3620000"/>
-          </a:xfrm>
-          <a:prstGeom prst="roundRect">
-            <a:avLst>
-              <a:gd name="adj" fmla="val 6971"/>
-            </a:avLst>
-          </a:prstGeom>
-          <a:solidFill>
-            <a:srgbClr val="FFFFFF"/>
-          </a:solidFill>
-          <a:ln w="28575" cap="flat" cmpd="sng">
-            <a:solidFill>
-              <a:schemeClr val="dk2"/>
-            </a:solidFill>
-            <a:prstDash val="solid"/>
-            <a:round/>
-            <a:headEnd type="none" w="sm" len="sm"/>
-            <a:tailEnd type="none" w="sm" len="sm"/>
-          </a:ln>
-        </p:spPr>
-        <p:txBody>
-          <a:bodyPr spcFirstLastPara="1" wrap="square" lIns="585133" tIns="585133" rIns="585133" bIns="585133" anchor="ctr" anchorCtr="0">
-            <a:noAutofit/>
-          </a:bodyPr>
-          <a:lstStyle/>
-          <a:p>
-            <a:pPr algn="ctr">
-              <a:buSzPts val="6700"/>
-            </a:pPr>
-            <a:endParaRPr sz="8933">
-              <a:solidFill>
-                <a:schemeClr val="dk2"/>
-              </a:solidFill>
-              <a:latin typeface="Calibri"/>
-              <a:ea typeface="Calibri"/>
-              <a:cs typeface="Calibri"/>
-              <a:sym typeface="Calibri"/>
-            </a:endParaRPr>
-          </a:p>
-        </p:txBody>
-      </p:sp>
-      <p:sp>
-        <p:nvSpPr>
-          <p:cNvPr id="512" name="Google Shape;512;g32cbaf05b3f_0_56"/>
-          <p:cNvSpPr txBox="1">
-            <a:spLocks noGrp="1"/>
-          </p:cNvSpPr>
-          <p:nvPr>
-            <p:ph type="title"/>
-          </p:nvPr>
-        </p:nvSpPr>
-        <p:spPr>
-          <a:xfrm>
-            <a:off x="415600" y="86563"/>
-            <a:ext cx="11360800" cy="763600"/>
-          </a:xfrm>
-          <a:prstGeom prst="rect">
-            <a:avLst/>
-          </a:prstGeom>
-          <a:noFill/>
-          <a:ln>
-            <a:noFill/>
-          </a:ln>
-        </p:spPr>
-        <p:txBody>
-          <a:bodyPr spcFirstLastPara="1" wrap="square" lIns="162533" tIns="162533" rIns="162533" bIns="162533" anchor="t" anchorCtr="0">
-            <a:noAutofit/>
-          </a:bodyPr>
-          <a:lstStyle/>
-          <a:p>
-            <a:pPr algn="ctr"/>
-            <a:r>
-              <a:rPr lang="en-US"/>
-              <a:t>What data do you have?</a:t>
-            </a:r>
-            <a:endParaRPr/>
-          </a:p>
-        </p:txBody>
-      </p:sp>
-      <p:sp>
-        <p:nvSpPr>
-          <p:cNvPr id="513" name="Google Shape;513;g32cbaf05b3f_0_56"/>
-          <p:cNvSpPr txBox="1">
-            <a:spLocks noGrp="1"/>
-          </p:cNvSpPr>
-          <p:nvPr>
-            <p:ph type="body" idx="1"/>
-          </p:nvPr>
-        </p:nvSpPr>
-        <p:spPr>
-          <a:xfrm>
-            <a:off x="1158300" y="1789800"/>
-            <a:ext cx="5350400" cy="3354000"/>
-          </a:xfrm>
-          <a:prstGeom prst="rect">
-            <a:avLst/>
-          </a:prstGeom>
-          <a:noFill/>
-          <a:ln>
-            <a:noFill/>
-          </a:ln>
-        </p:spPr>
-        <p:txBody>
-          <a:bodyPr spcFirstLastPara="1" wrap="square" lIns="162533" tIns="162533" rIns="162533" bIns="162533" anchor="t" anchorCtr="0">
-            <a:noAutofit/>
-          </a:bodyPr>
-          <a:lstStyle/>
-          <a:p>
-            <a:pPr marL="0" indent="0">
-              <a:lnSpc>
-                <a:spcPct val="100000"/>
-              </a:lnSpc>
-              <a:buNone/>
-            </a:pPr>
-            <a:r>
-              <a:rPr lang="en-US">
-                <a:solidFill>
-                  <a:schemeClr val="dk1"/>
-                </a:solidFill>
-              </a:rPr>
-              <a:t>How far back does historical data go?</a:t>
-            </a:r>
-            <a:endParaRPr>
-              <a:solidFill>
-                <a:schemeClr val="dk1"/>
-              </a:solidFill>
-            </a:endParaRPr>
-          </a:p>
-          <a:p>
-            <a:pPr marL="0" indent="0">
-              <a:lnSpc>
-                <a:spcPct val="100000"/>
-              </a:lnSpc>
-              <a:buNone/>
-            </a:pPr>
-            <a:endParaRPr>
-              <a:solidFill>
-                <a:schemeClr val="dk1"/>
-              </a:solidFill>
-            </a:endParaRPr>
-          </a:p>
-          <a:p>
-            <a:pPr marL="0" indent="0">
-              <a:lnSpc>
-                <a:spcPct val="100000"/>
-              </a:lnSpc>
-              <a:buNone/>
-            </a:pPr>
-            <a:endParaRPr>
-              <a:solidFill>
-                <a:schemeClr val="dk1"/>
-              </a:solidFill>
-            </a:endParaRPr>
-          </a:p>
-          <a:p>
-            <a:pPr marL="0" indent="0">
-              <a:lnSpc>
-                <a:spcPct val="100000"/>
-              </a:lnSpc>
-              <a:buNone/>
-            </a:pPr>
-            <a:r>
-              <a:rPr lang="en-US">
-                <a:solidFill>
-                  <a:schemeClr val="dk1"/>
-                </a:solidFill>
-              </a:rPr>
-              <a:t>What is the granularity of the data?</a:t>
-            </a:r>
-            <a:endParaRPr>
-              <a:solidFill>
-                <a:schemeClr val="dk1"/>
-              </a:solidFill>
-            </a:endParaRPr>
-          </a:p>
-          <a:p>
-            <a:pPr marL="0" indent="0">
-              <a:lnSpc>
-                <a:spcPct val="100000"/>
-              </a:lnSpc>
-              <a:buNone/>
-            </a:pPr>
-            <a:endParaRPr>
-              <a:solidFill>
-                <a:schemeClr val="dk1"/>
-              </a:solidFill>
-            </a:endParaRPr>
-          </a:p>
-          <a:p>
-            <a:pPr marL="0" indent="0">
-              <a:lnSpc>
-                <a:spcPct val="100000"/>
-              </a:lnSpc>
-              <a:buNone/>
-            </a:pPr>
-            <a:endParaRPr>
-              <a:solidFill>
-                <a:schemeClr val="dk1"/>
-              </a:solidFill>
-            </a:endParaRPr>
-          </a:p>
-          <a:p>
-            <a:pPr marL="0" indent="0">
-              <a:lnSpc>
-                <a:spcPct val="100000"/>
-              </a:lnSpc>
-              <a:buNone/>
-            </a:pPr>
-            <a:r>
-              <a:rPr lang="en-US">
-                <a:solidFill>
-                  <a:schemeClr val="dk1"/>
-                </a:solidFill>
-              </a:rPr>
-              <a:t>How is the data collected and updated? </a:t>
-            </a:r>
-            <a:br>
-              <a:rPr lang="en-US">
-                <a:solidFill>
-                  <a:schemeClr val="dk1"/>
-                </a:solidFill>
-              </a:rPr>
-            </a:br>
-            <a:r>
-              <a:rPr lang="en-US">
-                <a:solidFill>
-                  <a:schemeClr val="dk1"/>
-                </a:solidFill>
-              </a:rPr>
-              <a:t>With what frequency?</a:t>
-            </a:r>
-            <a:endParaRPr>
-              <a:solidFill>
-                <a:schemeClr val="dk1"/>
-              </a:solidFill>
-            </a:endParaRPr>
-          </a:p>
-        </p:txBody>
-      </p:sp>
-      <p:sp>
-        <p:nvSpPr>
-          <p:cNvPr id="514" name="Google Shape;514;g32cbaf05b3f_0_56"/>
-          <p:cNvSpPr txBox="1"/>
-          <p:nvPr/>
-        </p:nvSpPr>
-        <p:spPr>
-          <a:xfrm>
-            <a:off x="9115370" y="3026779"/>
-            <a:ext cx="1371294" cy="2015896"/>
-          </a:xfrm>
-          <a:prstGeom prst="rect">
-            <a:avLst/>
-          </a:prstGeom>
-          <a:noFill/>
-          <a:ln>
-            <a:noFill/>
-          </a:ln>
-        </p:spPr>
-        <p:txBody>
-          <a:bodyPr spcFirstLastPara="1" wrap="square" lIns="121900" tIns="121900" rIns="121900" bIns="121900" anchor="t" anchorCtr="0">
-            <a:spAutoFit/>
-          </a:bodyPr>
-          <a:lstStyle/>
-          <a:p>
-            <a:pPr>
-              <a:buSzPts val="1200"/>
-            </a:pPr>
-            <a:r>
-              <a:rPr lang="en-US" sz="11500" dirty="0">
-                <a:solidFill>
-                  <a:schemeClr val="dk2"/>
-                </a:solidFill>
-                <a:latin typeface="Lato"/>
-                <a:ea typeface="Lato"/>
-                <a:cs typeface="Lato"/>
-                <a:sym typeface="Lato"/>
-              </a:rPr>
-              <a:t>?</a:t>
-            </a:r>
-            <a:endParaRPr sz="9600" dirty="0">
-              <a:solidFill>
-                <a:schemeClr val="dk2"/>
-              </a:solidFill>
-              <a:latin typeface="Lato"/>
-              <a:ea typeface="Lato"/>
-              <a:cs typeface="Lato"/>
-              <a:sym typeface="Lato"/>
-            </a:endParaRPr>
-          </a:p>
-        </p:txBody>
-      </p:sp>
-      <p:sp>
-        <p:nvSpPr>
-          <p:cNvPr id="515" name="Google Shape;515;g32cbaf05b3f_0_56"/>
-          <p:cNvSpPr txBox="1"/>
-          <p:nvPr/>
-        </p:nvSpPr>
-        <p:spPr>
-          <a:xfrm>
-            <a:off x="8591800" y="1953400"/>
-            <a:ext cx="2678800" cy="763600"/>
-          </a:xfrm>
-          <a:prstGeom prst="rect">
-            <a:avLst/>
-          </a:prstGeom>
-          <a:solidFill>
-            <a:schemeClr val="lt1"/>
-          </a:solidFill>
-          <a:ln>
-            <a:noFill/>
-          </a:ln>
-        </p:spPr>
-        <p:txBody>
-          <a:bodyPr spcFirstLastPara="1" wrap="square" lIns="0" tIns="0" rIns="0" bIns="0" anchor="t" anchorCtr="0">
-            <a:noAutofit/>
-          </a:bodyPr>
-          <a:lstStyle/>
-          <a:p>
-            <a:pPr algn="ctr">
-              <a:buSzPts val="1700"/>
-            </a:pPr>
-            <a:r>
-              <a:rPr lang="en-US" sz="2400" b="1" dirty="0">
-                <a:solidFill>
-                  <a:schemeClr val="dk2"/>
-                </a:solidFill>
-                <a:latin typeface="Lato"/>
-                <a:ea typeface="Lato"/>
-                <a:cs typeface="Lato"/>
-                <a:sym typeface="Lato"/>
-              </a:rPr>
-              <a:t>Our water pipes example</a:t>
-            </a:r>
-            <a:endParaRPr sz="2400" b="1" dirty="0">
-              <a:solidFill>
-                <a:schemeClr val="dk2"/>
-              </a:solidFill>
-              <a:latin typeface="Lato"/>
-              <a:ea typeface="Lato"/>
-              <a:cs typeface="Lato"/>
-              <a:sym typeface="Lato"/>
-            </a:endParaRPr>
-          </a:p>
-        </p:txBody>
-      </p:sp>
-      <p:pic>
-        <p:nvPicPr>
-          <p:cNvPr id="516" name="Google Shape;516;g32cbaf05b3f_0_56"/>
-          <p:cNvPicPr preferRelativeResize="0"/>
-          <p:nvPr/>
-        </p:nvPicPr>
-        <p:blipFill rotWithShape="1">
-          <a:blip r:embed="rId3">
-            <a:alphaModFix/>
-          </a:blip>
-          <a:srcRect/>
-          <a:stretch/>
-        </p:blipFill>
-        <p:spPr>
-          <a:xfrm>
-            <a:off x="415600" y="1839367"/>
-            <a:ext cx="654400" cy="654400"/>
-          </a:xfrm>
-          <a:prstGeom prst="rect">
-            <a:avLst/>
-          </a:prstGeom>
-          <a:noFill/>
-          <a:ln>
-            <a:noFill/>
-          </a:ln>
-        </p:spPr>
-      </p:pic>
-      <p:pic>
-        <p:nvPicPr>
-          <p:cNvPr id="517" name="Google Shape;517;g32cbaf05b3f_0_56"/>
-          <p:cNvPicPr preferRelativeResize="0"/>
-          <p:nvPr/>
-        </p:nvPicPr>
-        <p:blipFill rotWithShape="1">
-          <a:blip r:embed="rId4">
-            <a:alphaModFix/>
-          </a:blip>
-          <a:srcRect/>
-          <a:stretch/>
-        </p:blipFill>
-        <p:spPr>
-          <a:xfrm>
-            <a:off x="415600" y="4161032"/>
-            <a:ext cx="654400" cy="654400"/>
-          </a:xfrm>
-          <a:prstGeom prst="rect">
-            <a:avLst/>
-          </a:prstGeom>
-          <a:noFill/>
-          <a:ln>
-            <a:noFill/>
-          </a:ln>
-        </p:spPr>
-      </p:pic>
-      <p:pic>
-        <p:nvPicPr>
-          <p:cNvPr id="518" name="Google Shape;518;g32cbaf05b3f_0_56"/>
-          <p:cNvPicPr preferRelativeResize="0"/>
-          <p:nvPr/>
-        </p:nvPicPr>
-        <p:blipFill rotWithShape="1">
-          <a:blip r:embed="rId5">
-            <a:alphaModFix/>
-          </a:blip>
-          <a:srcRect/>
-          <a:stretch/>
-        </p:blipFill>
-        <p:spPr>
-          <a:xfrm>
-            <a:off x="415600" y="2949399"/>
-            <a:ext cx="654400" cy="654400"/>
-          </a:xfrm>
-          <a:prstGeom prst="rect">
-            <a:avLst/>
-          </a:prstGeom>
-          <a:noFill/>
-          <a:ln>
-            <a:noFill/>
-          </a:ln>
-        </p:spPr>
-      </p:pic>
-    </p:spTree>
-  </p:cSld>
-  <p:clrMapOvr>
-    <a:masterClrMapping/>
-  </p:clrMapOvr>
-  <p:timing>
-    <p:tnLst>
-      <p:par>
-        <p:cTn id="1" dur="indefinite" restart="never" nodeType="tmRoot">
-          <p:childTnLst>
-            <p:seq concurrent="1" nextAc="seek">
-              <p:cTn id="2" dur="indefinite" nodeType="mainSeq">
-                <p:childTnLst>
-                  <p:par>
-                    <p:cTn id="3" fill="hold">
-                      <p:stCondLst>
-                        <p:cond delay="indefinite"/>
-                      </p:stCondLst>
-                      <p:childTnLst>
-                        <p:par>
-                          <p:cTn id="4" fill="hold">
-                            <p:stCondLst>
-                              <p:cond delay="0"/>
-                            </p:stCondLst>
-                            <p:childTnLst>
-                              <p:par>
-                                <p:cTn id="5" presetID="1" presetClass="entr" presetSubtype="0" fill="hold" nodeType="clickEffect">
-                                  <p:stCondLst>
-                                    <p:cond delay="0"/>
-                                  </p:stCondLst>
-                                  <p:childTnLst>
-                                    <p:set>
-                                      <p:cBhvr>
-                                        <p:cTn id="6" dur="1" fill="hold">
-                                          <p:stCondLst>
-                                            <p:cond delay="0"/>
-                                          </p:stCondLst>
-                                        </p:cTn>
-                                        <p:tgtEl>
-                                          <p:spTgt spid="514"/>
-                                        </p:tgtEl>
-                                        <p:attrNameLst>
-                                          <p:attrName>style.visibility</p:attrName>
-                                        </p:attrNameLst>
-                                      </p:cBhvr>
-                                      <p:to>
-                                        <p:strVal val="visible"/>
-                                      </p:to>
-                                    </p:set>
-                                  </p:childTnLst>
-                                </p:cTn>
-                              </p:par>
-                              <p:par>
-                                <p:cTn id="7" presetID="1" presetClass="entr" presetSubtype="0" fill="hold" nodeType="withEffect">
-                                  <p:stCondLst>
-                                    <p:cond delay="0"/>
-                                  </p:stCondLst>
-                                  <p:childTnLst>
-                                    <p:set>
-                                      <p:cBhvr>
-                                        <p:cTn id="8" dur="1" fill="hold">
-                                          <p:stCondLst>
-                                            <p:cond delay="0"/>
-                                          </p:stCondLst>
-                                        </p:cTn>
-                                        <p:tgtEl>
-                                          <p:spTgt spid="515"/>
-                                        </p:tgtEl>
-                                        <p:attrNameLst>
-                                          <p:attrName>style.visibility</p:attrName>
-                                        </p:attrNameLst>
-                                      </p:cBhvr>
-                                      <p:to>
-                                        <p:strVal val="visible"/>
-                                      </p:to>
-                                    </p:set>
-                                  </p:childTnLst>
-                                </p:cTn>
-                              </p:par>
-                              <p:par>
-                                <p:cTn id="9" presetID="1" presetClass="entr" presetSubtype="0" fill="hold" nodeType="withEffect">
-                                  <p:stCondLst>
-                                    <p:cond delay="0"/>
-                                  </p:stCondLst>
-                                  <p:childTnLst>
-                                    <p:set>
-                                      <p:cBhvr>
-                                        <p:cTn id="10" dur="1" fill="hold">
-                                          <p:stCondLst>
-                                            <p:cond delay="0"/>
-                                          </p:stCondLst>
-                                        </p:cTn>
-                                        <p:tgtEl>
-                                          <p:spTgt spid="511"/>
-                                        </p:tgtEl>
-                                        <p:attrNameLst>
-                                          <p:attrName>style.visibility</p:attrName>
-                                        </p:attrNameLst>
-                                      </p:cBhvr>
-                                      <p:to>
-                                        <p:strVal val="visible"/>
-                                      </p:to>
-                                    </p:set>
-                                  </p:childTnLst>
-                                </p:cTn>
-                              </p:par>
-                            </p:childTnLst>
-                          </p:cTn>
-                        </p:par>
-                      </p:childTnLst>
-                    </p:cTn>
-                  </p:par>
-                </p:childTnLst>
-              </p:cTn>
-              <p:prevCondLst>
-                <p:cond evt="onPrev" delay="0">
-                  <p:tgtEl>
-                    <p:sldTgt/>
-                  </p:tgtEl>
-                </p:cond>
-              </p:prevCondLst>
-              <p:nextCondLst>
-                <p:cond evt="onNext" delay="0">
-                  <p:tgtEl>
-                    <p:sldTgt/>
-                  </p:tgtEl>
-                </p:cond>
-              </p:nextCondLst>
-            </p:seq>
-          </p:childTnLst>
-        </p:cTn>
-      </p:par>
-    </p:tnLst>
-  </p:timing>
-</p:sld>
-</file>
-
-<file path=ppt/slides/slide6.xml><?xml version="1.0" encoding="utf-8"?>
-<p:sld xmlns:a="http://schemas.openxmlformats.org/drawingml/2006/main" xmlns:r="http://schemas.openxmlformats.org/officeDocument/2006/relationships" xmlns:p="http://schemas.openxmlformats.org/presentationml/2006/main">
-  <p:cSld>
-    <p:spTree>
-      <p:nvGrpSpPr>
         <p:cNvPr id="1" name="Shape 524"/>
         <p:cNvGrpSpPr/>
         <p:nvPr/>
@@ -16915,7 +15650,7 @@
 </p:sld>
 </file>
 
-<file path=ppt/slides/slide7.xml><?xml version="1.0" encoding="utf-8"?>
+<file path=ppt/slides/slide6.xml><?xml version="1.0" encoding="utf-8"?>
 <p:sld xmlns:a="http://schemas.openxmlformats.org/drawingml/2006/main" xmlns:r="http://schemas.openxmlformats.org/officeDocument/2006/relationships" xmlns:p="http://schemas.openxmlformats.org/presentationml/2006/main">
   <p:cSld>
     <p:spTree>
@@ -17095,162 +15830,7 @@
 </p:sld>
 </file>
 
-<file path=ppt/slides/slide8.xml><?xml version="1.0" encoding="utf-8"?>
-<p:sld xmlns:a="http://schemas.openxmlformats.org/drawingml/2006/main" xmlns:r="http://schemas.openxmlformats.org/officeDocument/2006/relationships" xmlns:p="http://schemas.openxmlformats.org/presentationml/2006/main">
-  <p:cSld>
-    <p:spTree>
-      <p:nvGrpSpPr>
-        <p:cNvPr id="1" name="Shape 541"/>
-        <p:cNvGrpSpPr/>
-        <p:nvPr/>
-      </p:nvGrpSpPr>
-      <p:grpSpPr>
-        <a:xfrm>
-          <a:off x="0" y="0"/>
-          <a:ext cx="0" cy="0"/>
-          <a:chOff x="0" y="0"/>
-          <a:chExt cx="0" cy="0"/>
-        </a:xfrm>
-      </p:grpSpPr>
-      <p:sp>
-        <p:nvSpPr>
-          <p:cNvPr id="542" name="Google Shape;542;g32d3355825c_1_12"/>
-          <p:cNvSpPr txBox="1">
-            <a:spLocks noGrp="1"/>
-          </p:cNvSpPr>
-          <p:nvPr>
-            <p:ph type="title"/>
-          </p:nvPr>
-        </p:nvSpPr>
-        <p:spPr>
-          <a:xfrm>
-            <a:off x="415600" y="86563"/>
-            <a:ext cx="11360800" cy="763600"/>
-          </a:xfrm>
-          <a:prstGeom prst="rect">
-            <a:avLst/>
-          </a:prstGeom>
-          <a:noFill/>
-          <a:ln>
-            <a:noFill/>
-          </a:ln>
-        </p:spPr>
-        <p:txBody>
-          <a:bodyPr spcFirstLastPara="1" wrap="square" lIns="162533" tIns="162533" rIns="162533" bIns="162533" anchor="t" anchorCtr="0">
-            <a:noAutofit/>
-          </a:bodyPr>
-          <a:lstStyle/>
-          <a:p>
-            <a:pPr algn="ctr"/>
-            <a:r>
-              <a:rPr lang="en-US"/>
-              <a:t>Example: preventing water main breaks in Syracuse</a:t>
-            </a:r>
-            <a:endParaRPr/>
-          </a:p>
-        </p:txBody>
-      </p:sp>
-      <p:sp>
-        <p:nvSpPr>
-          <p:cNvPr id="543" name="Google Shape;543;g32d3355825c_1_12"/>
-          <p:cNvSpPr txBox="1">
-            <a:spLocks noGrp="1"/>
-          </p:cNvSpPr>
-          <p:nvPr>
-            <p:ph type="body" idx="1"/>
-          </p:nvPr>
-        </p:nvSpPr>
-        <p:spPr>
-          <a:xfrm>
-            <a:off x="415600" y="1536633"/>
-            <a:ext cx="5314000" cy="4555200"/>
-          </a:xfrm>
-          <a:prstGeom prst="rect">
-            <a:avLst/>
-          </a:prstGeom>
-          <a:noFill/>
-          <a:ln>
-            <a:noFill/>
-          </a:ln>
-        </p:spPr>
-        <p:txBody>
-          <a:bodyPr spcFirstLastPara="1" wrap="square" lIns="162533" tIns="162533" rIns="162533" bIns="162533" anchor="t" anchorCtr="0">
-            <a:noAutofit/>
-          </a:bodyPr>
-          <a:lstStyle/>
-          <a:p>
-            <a:pPr marL="0" indent="0">
-              <a:lnSpc>
-                <a:spcPct val="100000"/>
-              </a:lnSpc>
-              <a:buNone/>
-            </a:pPr>
-            <a:r>
-              <a:rPr lang="en-US"/>
-              <a:t>Key information about pipe age, diameter, and material was only available in 100-year-old handwritten notebooks of installation diagrams</a:t>
-            </a:r>
-            <a:endParaRPr/>
-          </a:p>
-          <a:p>
-            <a:pPr marL="0" indent="0">
-              <a:lnSpc>
-                <a:spcPct val="100000"/>
-              </a:lnSpc>
-              <a:buNone/>
-            </a:pPr>
-            <a:endParaRPr/>
-          </a:p>
-          <a:p>
-            <a:pPr marL="0" indent="0">
-              <a:lnSpc>
-                <a:spcPct val="100000"/>
-              </a:lnSpc>
-              <a:buNone/>
-            </a:pPr>
-            <a:r>
-              <a:rPr lang="en-US"/>
-              <a:t>Strategically digitizing these records enabled us to more accurately predict whether a water main would break </a:t>
-            </a:r>
-            <a:endParaRPr/>
-          </a:p>
-        </p:txBody>
-      </p:sp>
-      <p:pic>
-        <p:nvPicPr>
-          <p:cNvPr id="544" name="Google Shape;544;g32d3355825c_1_12"/>
-          <p:cNvPicPr preferRelativeResize="0"/>
-          <p:nvPr/>
-        </p:nvPicPr>
-        <p:blipFill rotWithShape="1">
-          <a:blip r:embed="rId3">
-            <a:alphaModFix/>
-          </a:blip>
-          <a:srcRect/>
-          <a:stretch/>
-        </p:blipFill>
-        <p:spPr>
-          <a:xfrm>
-            <a:off x="5729500" y="1536633"/>
-            <a:ext cx="6046896" cy="4555200"/>
-          </a:xfrm>
-          <a:prstGeom prst="rect">
-            <a:avLst/>
-          </a:prstGeom>
-          <a:noFill/>
-          <a:ln>
-            <a:noFill/>
-          </a:ln>
-        </p:spPr>
-      </p:pic>
-    </p:spTree>
-  </p:cSld>
-  <p:clrMapOvr>
-    <a:masterClrMapping/>
-  </p:clrMapOvr>
-</p:sld>
-</file>
-
-<file path=ppt/slides/slide9.xml><?xml version="1.0" encoding="utf-8"?>
+<file path=ppt/slides/slide7.xml><?xml version="1.0" encoding="utf-8"?>
 <p:sld xmlns:a="http://schemas.openxmlformats.org/drawingml/2006/main" xmlns:r="http://schemas.openxmlformats.org/officeDocument/2006/relationships" xmlns:p="http://schemas.openxmlformats.org/presentationml/2006/main">
   <p:cSld>
     <p:spTree>
@@ -17359,6 +15939,193 @@
     <p:extLst>
       <p:ext uri="{BB962C8B-B14F-4D97-AF65-F5344CB8AC3E}">
         <p14:creationId xmlns:p14="http://schemas.microsoft.com/office/powerpoint/2010/main" val="1721185332"/>
+      </p:ext>
+    </p:extLst>
+  </p:cSld>
+  <p:clrMapOvr>
+    <a:masterClrMapping/>
+  </p:clrMapOvr>
+</p:sld>
+</file>
+
+<file path=ppt/slides/slide8.xml><?xml version="1.0" encoding="utf-8"?>
+<p:sld xmlns:a="http://schemas.openxmlformats.org/drawingml/2006/main" xmlns:r="http://schemas.openxmlformats.org/officeDocument/2006/relationships" xmlns:p="http://schemas.openxmlformats.org/presentationml/2006/main">
+  <p:cSld>
+    <p:spTree>
+      <p:nvGrpSpPr>
+        <p:cNvPr id="1" name=""/>
+        <p:cNvGrpSpPr/>
+        <p:nvPr/>
+      </p:nvGrpSpPr>
+      <p:grpSpPr>
+        <a:xfrm>
+          <a:off x="0" y="0"/>
+          <a:ext cx="0" cy="0"/>
+          <a:chOff x="0" y="0"/>
+          <a:chExt cx="0" cy="0"/>
+        </a:xfrm>
+      </p:grpSpPr>
+      <p:sp>
+        <p:nvSpPr>
+          <p:cNvPr id="2" name="Title 1">
+            <a:extLst>
+              <a:ext uri="{FF2B5EF4-FFF2-40B4-BE49-F238E27FC236}">
+                <a16:creationId xmlns:a16="http://schemas.microsoft.com/office/drawing/2014/main" id="{CE46E641-F79B-6F49-B8EF-A4D6E70FF61F}"/>
+              </a:ext>
+            </a:extLst>
+          </p:cNvPr>
+          <p:cNvSpPr>
+            <a:spLocks noGrp="1"/>
+          </p:cNvSpPr>
+          <p:nvPr>
+            <p:ph type="title"/>
+          </p:nvPr>
+        </p:nvSpPr>
+        <p:spPr/>
+        <p:txBody>
+          <a:bodyPr/>
+          <a:lstStyle/>
+          <a:p>
+            <a:r>
+              <a:rPr lang="en-US" dirty="0"/>
+              <a:t>Scenarios</a:t>
+            </a:r>
+          </a:p>
+        </p:txBody>
+      </p:sp>
+      <p:sp>
+        <p:nvSpPr>
+          <p:cNvPr id="3" name="Text Placeholder 2">
+            <a:extLst>
+              <a:ext uri="{FF2B5EF4-FFF2-40B4-BE49-F238E27FC236}">
+                <a16:creationId xmlns:a16="http://schemas.microsoft.com/office/drawing/2014/main" id="{109530BD-D523-581E-F9C9-8075A2275413}"/>
+              </a:ext>
+            </a:extLst>
+          </p:cNvPr>
+          <p:cNvSpPr>
+            <a:spLocks noGrp="1"/>
+          </p:cNvSpPr>
+          <p:nvPr>
+            <p:ph type="body" idx="1"/>
+          </p:nvPr>
+        </p:nvSpPr>
+        <p:spPr/>
+        <p:txBody>
+          <a:bodyPr/>
+          <a:lstStyle/>
+          <a:p>
+            <a:r>
+              <a:rPr lang="en-US" dirty="0"/>
+              <a:t>Internal to an organization</a:t>
+            </a:r>
+          </a:p>
+          <a:p>
+            <a:r>
+              <a:rPr lang="en-US" dirty="0"/>
+              <a:t>Partnering with external organization – researcher, consultant, etc.</a:t>
+            </a:r>
+          </a:p>
+        </p:txBody>
+      </p:sp>
+    </p:spTree>
+    <p:extLst>
+      <p:ext uri="{BB962C8B-B14F-4D97-AF65-F5344CB8AC3E}">
+        <p14:creationId xmlns:p14="http://schemas.microsoft.com/office/powerpoint/2010/main" val="3974381565"/>
+      </p:ext>
+    </p:extLst>
+  </p:cSld>
+  <p:clrMapOvr>
+    <a:masterClrMapping/>
+  </p:clrMapOvr>
+</p:sld>
+</file>
+
+<file path=ppt/slides/slide9.xml><?xml version="1.0" encoding="utf-8"?>
+<p:sld xmlns:a="http://schemas.openxmlformats.org/drawingml/2006/main" xmlns:r="http://schemas.openxmlformats.org/officeDocument/2006/relationships" xmlns:p="http://schemas.openxmlformats.org/presentationml/2006/main">
+  <p:cSld>
+    <p:spTree>
+      <p:nvGrpSpPr>
+        <p:cNvPr id="1" name=""/>
+        <p:cNvGrpSpPr/>
+        <p:nvPr/>
+      </p:nvGrpSpPr>
+      <p:grpSpPr>
+        <a:xfrm>
+          <a:off x="0" y="0"/>
+          <a:ext cx="0" cy="0"/>
+          <a:chOff x="0" y="0"/>
+          <a:chExt cx="0" cy="0"/>
+        </a:xfrm>
+      </p:grpSpPr>
+      <p:sp>
+        <p:nvSpPr>
+          <p:cNvPr id="2" name="Title 1">
+            <a:extLst>
+              <a:ext uri="{FF2B5EF4-FFF2-40B4-BE49-F238E27FC236}">
+                <a16:creationId xmlns:a16="http://schemas.microsoft.com/office/drawing/2014/main" id="{979BFBA3-9597-C18F-DC54-EA1CD2F2D248}"/>
+              </a:ext>
+            </a:extLst>
+          </p:cNvPr>
+          <p:cNvSpPr>
+            <a:spLocks noGrp="1"/>
+          </p:cNvSpPr>
+          <p:nvPr>
+            <p:ph type="title"/>
+          </p:nvPr>
+        </p:nvSpPr>
+        <p:spPr/>
+        <p:txBody>
+          <a:bodyPr/>
+          <a:lstStyle/>
+          <a:p>
+            <a:r>
+              <a:rPr lang="en-US" dirty="0"/>
+              <a:t>Political Challenges</a:t>
+            </a:r>
+          </a:p>
+        </p:txBody>
+      </p:sp>
+      <p:sp>
+        <p:nvSpPr>
+          <p:cNvPr id="3" name="Text Placeholder 2">
+            <a:extLst>
+              <a:ext uri="{FF2B5EF4-FFF2-40B4-BE49-F238E27FC236}">
+                <a16:creationId xmlns:a16="http://schemas.microsoft.com/office/drawing/2014/main" id="{C6BF3655-4FBB-7724-83F4-8175A4967B32}"/>
+              </a:ext>
+            </a:extLst>
+          </p:cNvPr>
+          <p:cNvSpPr>
+            <a:spLocks noGrp="1"/>
+          </p:cNvSpPr>
+          <p:nvPr>
+            <p:ph type="body" idx="1"/>
+          </p:nvPr>
+        </p:nvSpPr>
+        <p:spPr/>
+        <p:txBody>
+          <a:bodyPr/>
+          <a:lstStyle/>
+          <a:p>
+            <a:r>
+              <a:rPr lang="en-US" dirty="0"/>
+              <a:t>Understanding the stakeholders and value for them</a:t>
+            </a:r>
+          </a:p>
+          <a:p>
+            <a:r>
+              <a:rPr lang="en-US" dirty="0"/>
+              <a:t>May lead to getting subsets</a:t>
+            </a:r>
+          </a:p>
+          <a:p>
+            <a:endParaRPr lang="en-US" dirty="0"/>
+          </a:p>
+        </p:txBody>
+      </p:sp>
+    </p:spTree>
+    <p:extLst>
+      <p:ext uri="{BB962C8B-B14F-4D97-AF65-F5344CB8AC3E}">
+        <p14:creationId xmlns:p14="http://schemas.microsoft.com/office/powerpoint/2010/main" val="2201292742"/>
       </p:ext>
     </p:extLst>
   </p:cSld>

--- a/Lectures/04-data.pptx
+++ b/Lectures/04-data.pptx
@@ -262,7 +262,7 @@
       <p15:sldGuideLst xmlns:p15="http://schemas.microsoft.com/office/powerpoint/2012/main"/>
     </p:ext>
     <p:ext uri="http://customooxmlschemas.google.com/">
-      <go:slidesCustomData xmlns="" xmlns:mc="http://schemas.openxmlformats.org/markup-compatibility/2006" xmlns:mv="urn:schemas-microsoft-com:mac:vml" xmlns:c="http://schemas.openxmlformats.org/drawingml/2006/chart" xmlns:dgm="http://schemas.openxmlformats.org/drawingml/2006/diagram" xmlns:o="urn:schemas-microsoft-com:office:office" xmlns:v="urn:schemas-microsoft-com:vml" xmlns:pvml="urn:schemas-microsoft-com:office:powerpoint" xmlns:com="http://schemas.openxmlformats.org/drawingml/2006/compatibility" xmlns:p14="http://schemas.microsoft.com/office/powerpoint/2010/main" xmlns:p15="http://schemas.microsoft.com/office/powerpoint/2012/main" xmlns:go="http://customooxmlschemas.google.com/" r:id="rId34" roundtripDataSignature="AMtx7mjFyVUGRZWio+dc9dxzYsimUxNJbg=="/>
+      <go:slidesCustomData xmlns:go="http://customooxmlschemas.google.com/" xmlns:p15="http://schemas.microsoft.com/office/powerpoint/2012/main" xmlns:p14="http://schemas.microsoft.com/office/powerpoint/2010/main" xmlns:com="http://schemas.openxmlformats.org/drawingml/2006/compatibility" xmlns:pvml="urn:schemas-microsoft-com:office:powerpoint" xmlns:v="urn:schemas-microsoft-com:vml" xmlns:o="urn:schemas-microsoft-com:office:office" xmlns:dgm="http://schemas.openxmlformats.org/drawingml/2006/diagram" xmlns:c="http://schemas.openxmlformats.org/drawingml/2006/chart" xmlns:mv="urn:schemas-microsoft-com:mac:vml" xmlns:mc="http://schemas.openxmlformats.org/markup-compatibility/2006" xmlns="" r:id="rId34" roundtripDataSignature="AMtx7mjFyVUGRZWio+dc9dxzYsimUxNJbg=="/>
     </p:ext>
   </p:extLst>
 </p:presentation>
@@ -7033,10 +7033,10 @@
               <a:buNone/>
             </a:pPr>
             <a:r>
-              <a:rPr lang="en-US"/>
+              <a:rPr lang="en-US" dirty="0"/>
               <a:t>Data is never perfect –  is it useful enough to improve over status quo?</a:t>
             </a:r>
-            <a:endParaRPr/>
+            <a:endParaRPr dirty="0"/>
           </a:p>
           <a:p>
             <a:pPr marL="0" lvl="0" indent="0" algn="l" rtl="0">
@@ -7053,10 +7053,10 @@
               <a:buNone/>
             </a:pPr>
             <a:r>
-              <a:rPr lang="en-US"/>
+              <a:rPr lang="en-US" dirty="0"/>
               <a:t>Can you augment with external data? Public data? Partner with other organizations that have supplementary data?</a:t>
             </a:r>
-            <a:endParaRPr/>
+            <a:endParaRPr dirty="0"/>
           </a:p>
         </p:txBody>
       </p:sp>
@@ -14610,7 +14610,7 @@
             </a:r>
             <a:r>
               <a:rPr lang="en-US" dirty="0"/>
-              <a:t>preparation guidelines</a:t>
+              <a:t>preparation guidelines (on canvas)</a:t>
             </a:r>
           </a:p>
         </p:txBody>
